--- a/chapter9/ASE_9_program_manager.pptx
+++ b/chapter9/ASE_9_program_manager.pptx
@@ -6,7 +6,7 @@
     <p:sldMasterId id="2147483870" r:id="rId5"/>
   </p:sldMasterIdLst>
   <p:notesMasterIdLst>
-    <p:notesMasterId r:id="rId65"/>
+    <p:notesMasterId r:id="rId66"/>
   </p:notesMasterIdLst>
   <p:sldIdLst>
     <p:sldId id="265" r:id="rId6"/>
@@ -58,16 +58,17 @@
     <p:sldId id="314" r:id="rId52"/>
     <p:sldId id="315" r:id="rId53"/>
     <p:sldId id="316" r:id="rId54"/>
-    <p:sldId id="317" r:id="rId55"/>
-    <p:sldId id="318" r:id="rId56"/>
-    <p:sldId id="320" r:id="rId57"/>
-    <p:sldId id="335" r:id="rId58"/>
-    <p:sldId id="321" r:id="rId59"/>
-    <p:sldId id="319" r:id="rId60"/>
-    <p:sldId id="281" r:id="rId61"/>
-    <p:sldId id="299" r:id="rId62"/>
-    <p:sldId id="277" r:id="rId63"/>
-    <p:sldId id="322" r:id="rId64"/>
+    <p:sldId id="336" r:id="rId55"/>
+    <p:sldId id="317" r:id="rId56"/>
+    <p:sldId id="318" r:id="rId57"/>
+    <p:sldId id="320" r:id="rId58"/>
+    <p:sldId id="335" r:id="rId59"/>
+    <p:sldId id="321" r:id="rId60"/>
+    <p:sldId id="319" r:id="rId61"/>
+    <p:sldId id="281" r:id="rId62"/>
+    <p:sldId id="299" r:id="rId63"/>
+    <p:sldId id="277" r:id="rId64"/>
+    <p:sldId id="322" r:id="rId65"/>
   </p:sldIdLst>
   <p:sldSz cx="12192000" cy="6858000"/>
   <p:notesSz cx="6858000" cy="9144000"/>
@@ -218,7 +219,7 @@
 <file path=ppt/revisionInfo.xml><?xml version="1.0" encoding="utf-8"?>
 <p1510:revInfo xmlns:a="http://schemas.openxmlformats.org/drawingml/2006/main" xmlns:r="http://schemas.openxmlformats.org/officeDocument/2006/relationships" xmlns:p1510="http://schemas.microsoft.com/office/powerpoint/2015/10/main">
   <p1510:revLst>
-    <p1510:client id="{A2813A9E-22ED-458D-9690-FC62CFE1BB3E}" v="30" dt="2019-09-04T07:44:52.708"/>
+    <p1510:client id="{619CF08D-36C0-4BFD-90C6-292700D15563}" v="168" dt="2026-05-06T12:43:09.861"/>
   </p1510:revLst>
 </p1510:revInfo>
 </file>
@@ -226,135 +227,20 @@
 <file path=ppt/changesInfos/changesInfo1.xml><?xml version="1.0" encoding="utf-8"?>
 <pc:chgInfo xmlns:a="http://schemas.openxmlformats.org/drawingml/2006/main" xmlns:r="http://schemas.openxmlformats.org/officeDocument/2006/relationships" xmlns:ac="http://schemas.microsoft.com/office/drawing/2013/main/command" xmlns:pc="http://schemas.microsoft.com/office/powerpoint/2013/main/command">
   <pc:docChgLst>
-    <pc:chgData name="Xin Zou" userId="260b9726081dae15" providerId="LiveId" clId="{46DFD426-ED4D-43B9-906F-4E50473E9166}"/>
-    <pc:docChg chg="undo custSel mod addSld delSld modSld modMainMaster">
-      <pc:chgData name="Xin Zou" userId="260b9726081dae15" providerId="LiveId" clId="{46DFD426-ED4D-43B9-906F-4E50473E9166}" dt="2018-10-22T02:42:58.548" v="791" actId="14100"/>
+    <pc:chgData name="Xin Zou" userId="260b9726081dae15" providerId="LiveId" clId="{9D297BCE-98D2-4025-9670-F2ABFDE5436C}"/>
+    <pc:docChg chg="undo custSel addSld modSld">
+      <pc:chgData name="Xin Zou" userId="260b9726081dae15" providerId="LiveId" clId="{9D297BCE-98D2-4025-9670-F2ABFDE5436C}" dt="2026-05-06T12:43:26.480" v="1006" actId="478"/>
       <pc:docMkLst>
         <pc:docMk/>
       </pc:docMkLst>
-      <pc:sldChg chg="modSp add">
-        <pc:chgData name="Xin Zou" userId="260b9726081dae15" providerId="LiveId" clId="{46DFD426-ED4D-43B9-906F-4E50473E9166}" dt="2018-10-22T02:41:39.328" v="787" actId="2711"/>
-        <pc:sldMkLst>
-          <pc:docMk/>
-          <pc:sldMk cId="0" sldId="258"/>
-        </pc:sldMkLst>
-        <pc:spChg chg="mod">
-          <ac:chgData name="Xin Zou" userId="260b9726081dae15" providerId="LiveId" clId="{46DFD426-ED4D-43B9-906F-4E50473E9166}" dt="2018-10-22T02:41:31.854" v="786" actId="2711"/>
-          <ac:spMkLst>
-            <pc:docMk/>
-            <pc:sldMk cId="0" sldId="258"/>
-            <ac:spMk id="171013" creationId="{00000000-0000-0000-0000-000000000000}"/>
-          </ac:spMkLst>
-        </pc:spChg>
-        <pc:spChg chg="mod">
-          <ac:chgData name="Xin Zou" userId="260b9726081dae15" providerId="LiveId" clId="{46DFD426-ED4D-43B9-906F-4E50473E9166}" dt="2018-10-22T02:41:39.328" v="787" actId="2711"/>
-          <ac:spMkLst>
-            <pc:docMk/>
-            <pc:sldMk cId="0" sldId="258"/>
-            <ac:spMk id="171014" creationId="{00000000-0000-0000-0000-000000000000}"/>
-          </ac:spMkLst>
-        </pc:spChg>
-      </pc:sldChg>
-      <pc:sldChg chg="modSp add">
-        <pc:chgData name="Xin Zou" userId="260b9726081dae15" providerId="LiveId" clId="{46DFD426-ED4D-43B9-906F-4E50473E9166}" dt="2018-10-22T02:41:07.575" v="785" actId="2711"/>
-        <pc:sldMkLst>
-          <pc:docMk/>
-          <pc:sldMk cId="0" sldId="259"/>
-        </pc:sldMkLst>
-        <pc:spChg chg="mod">
-          <ac:chgData name="Xin Zou" userId="260b9726081dae15" providerId="LiveId" clId="{46DFD426-ED4D-43B9-906F-4E50473E9166}" dt="2018-10-22T02:41:00.413" v="784" actId="2711"/>
-          <ac:spMkLst>
-            <pc:docMk/>
-            <pc:sldMk cId="0" sldId="259"/>
-            <ac:spMk id="138242" creationId="{00000000-0000-0000-0000-000000000000}"/>
-          </ac:spMkLst>
-        </pc:spChg>
-        <pc:graphicFrameChg chg="modGraphic">
-          <ac:chgData name="Xin Zou" userId="260b9726081dae15" providerId="LiveId" clId="{46DFD426-ED4D-43B9-906F-4E50473E9166}" dt="2018-10-22T02:41:07.575" v="785" actId="2711"/>
-          <ac:graphicFrameMkLst>
-            <pc:docMk/>
-            <pc:sldMk cId="0" sldId="259"/>
-            <ac:graphicFrameMk id="138268" creationId="{00000000-0000-0000-0000-000000000000}"/>
-          </ac:graphicFrameMkLst>
-        </pc:graphicFrameChg>
-      </pc:sldChg>
       <pc:sldChg chg="modSp">
-        <pc:chgData name="Xin Zou" userId="260b9726081dae15" providerId="LiveId" clId="{46DFD426-ED4D-43B9-906F-4E50473E9166}" dt="2018-10-08T17:27:33.469" v="678" actId="27636"/>
-        <pc:sldMkLst>
-          <pc:docMk/>
-          <pc:sldMk cId="0" sldId="265"/>
-        </pc:sldMkLst>
-        <pc:spChg chg="mod">
-          <ac:chgData name="Xin Zou" userId="260b9726081dae15" providerId="LiveId" clId="{46DFD426-ED4D-43B9-906F-4E50473E9166}" dt="2018-10-08T17:27:33.464" v="677" actId="27636"/>
-          <ac:spMkLst>
-            <pc:docMk/>
-            <pc:sldMk cId="0" sldId="265"/>
-            <ac:spMk id="6146" creationId="{00000000-0000-0000-0000-000000000000}"/>
-          </ac:spMkLst>
-        </pc:spChg>
-        <pc:spChg chg="mod">
-          <ac:chgData name="Xin Zou" userId="260b9726081dae15" providerId="LiveId" clId="{46DFD426-ED4D-43B9-906F-4E50473E9166}" dt="2018-10-08T17:27:33.469" v="678" actId="27636"/>
-          <ac:spMkLst>
-            <pc:docMk/>
-            <pc:sldMk cId="0" sldId="265"/>
-            <ac:spMk id="6147" creationId="{00000000-0000-0000-0000-000000000000}"/>
-          </ac:spMkLst>
-        </pc:spChg>
-      </pc:sldChg>
-      <pc:sldChg chg="modSp">
-        <pc:chgData name="Xin Zou" userId="260b9726081dae15" providerId="LiveId" clId="{46DFD426-ED4D-43B9-906F-4E50473E9166}" dt="2018-10-08T17:28:51.435" v="783"/>
-        <pc:sldMkLst>
-          <pc:docMk/>
-          <pc:sldMk cId="0" sldId="266"/>
-        </pc:sldMkLst>
-        <pc:spChg chg="mod">
-          <ac:chgData name="Xin Zou" userId="260b9726081dae15" providerId="LiveId" clId="{46DFD426-ED4D-43B9-906F-4E50473E9166}" dt="2018-10-08T17:28:07.150" v="715"/>
-          <ac:spMkLst>
-            <pc:docMk/>
-            <pc:sldMk cId="0" sldId="266"/>
-            <ac:spMk id="7170" creationId="{00000000-0000-0000-0000-000000000000}"/>
-          </ac:spMkLst>
-        </pc:spChg>
-        <pc:spChg chg="mod">
-          <ac:chgData name="Xin Zou" userId="260b9726081dae15" providerId="LiveId" clId="{46DFD426-ED4D-43B9-906F-4E50473E9166}" dt="2018-10-08T17:28:51.435" v="783"/>
-          <ac:spMkLst>
-            <pc:docMk/>
-            <pc:sldMk cId="0" sldId="266"/>
-            <ac:spMk id="7171" creationId="{00000000-0000-0000-0000-000000000000}"/>
-          </ac:spMkLst>
-        </pc:spChg>
-      </pc:sldChg>
-      <pc:sldChg chg="modSp">
-        <pc:chgData name="Xin Zou" userId="260b9726081dae15" providerId="LiveId" clId="{46DFD426-ED4D-43B9-906F-4E50473E9166}" dt="2018-10-06T23:22:44.096" v="119"/>
-        <pc:sldMkLst>
-          <pc:docMk/>
-          <pc:sldMk cId="0" sldId="267"/>
-        </pc:sldMkLst>
-        <pc:spChg chg="mod">
-          <ac:chgData name="Xin Zou" userId="260b9726081dae15" providerId="LiveId" clId="{46DFD426-ED4D-43B9-906F-4E50473E9166}" dt="2018-10-06T23:22:44.096" v="119"/>
-          <ac:spMkLst>
-            <pc:docMk/>
-            <pc:sldMk cId="0" sldId="267"/>
-            <ac:spMk id="3" creationId="{00000000-0000-0000-0000-000000000000}"/>
-          </ac:spMkLst>
-        </pc:spChg>
-        <pc:picChg chg="mod">
-          <ac:chgData name="Xin Zou" userId="260b9726081dae15" providerId="LiveId" clId="{46DFD426-ED4D-43B9-906F-4E50473E9166}" dt="2018-10-06T23:22:44.096" v="119"/>
-          <ac:picMkLst>
-            <pc:docMk/>
-            <pc:sldMk cId="0" sldId="267"/>
-            <ac:picMk id="6" creationId="{00000000-0000-0000-0000-000000000000}"/>
-          </ac:picMkLst>
-        </pc:picChg>
-      </pc:sldChg>
-      <pc:sldChg chg="modSp">
-        <pc:chgData name="Xin Zou" userId="260b9726081dae15" providerId="LiveId" clId="{46DFD426-ED4D-43B9-906F-4E50473E9166}" dt="2018-10-06T23:24:07.001" v="138" actId="27636"/>
+        <pc:chgData name="Xin Zou" userId="260b9726081dae15" providerId="LiveId" clId="{9D297BCE-98D2-4025-9670-F2ABFDE5436C}" dt="2026-05-06T12:43:09.860" v="1005" actId="20577"/>
         <pc:sldMkLst>
           <pc:docMk/>
           <pc:sldMk cId="0" sldId="268"/>
         </pc:sldMkLst>
         <pc:spChg chg="mod">
-          <ac:chgData name="Xin Zou" userId="260b9726081dae15" providerId="LiveId" clId="{46DFD426-ED4D-43B9-906F-4E50473E9166}" dt="2018-10-06T23:24:07.001" v="138" actId="27636"/>
+          <ac:chgData name="Xin Zou" userId="260b9726081dae15" providerId="LiveId" clId="{9D297BCE-98D2-4025-9670-F2ABFDE5436C}" dt="2026-05-06T12:43:09.860" v="1005" actId="20577"/>
           <ac:spMkLst>
             <pc:docMk/>
             <pc:sldMk cId="0" sldId="268"/>
@@ -362,851 +248,17 @@
           </ac:spMkLst>
         </pc:spChg>
       </pc:sldChg>
-      <pc:sldChg chg="modSp modAnim">
-        <pc:chgData name="Xin Zou" userId="260b9726081dae15" providerId="LiveId" clId="{46DFD426-ED4D-43B9-906F-4E50473E9166}" dt="2018-10-22T02:42:58.548" v="791" actId="14100"/>
-        <pc:sldMkLst>
-          <pc:docMk/>
-          <pc:sldMk cId="0" sldId="269"/>
-        </pc:sldMkLst>
-        <pc:spChg chg="mod">
-          <ac:chgData name="Xin Zou" userId="260b9726081dae15" providerId="LiveId" clId="{46DFD426-ED4D-43B9-906F-4E50473E9166}" dt="2018-10-22T02:42:58.548" v="791" actId="14100"/>
-          <ac:spMkLst>
-            <pc:docMk/>
-            <pc:sldMk cId="0" sldId="269"/>
-            <ac:spMk id="6" creationId="{00000000-0000-0000-0000-000000000000}"/>
-          </ac:spMkLst>
-        </pc:spChg>
-        <pc:picChg chg="mod">
-          <ac:chgData name="Xin Zou" userId="260b9726081dae15" providerId="LiveId" clId="{46DFD426-ED4D-43B9-906F-4E50473E9166}" dt="2018-10-06T23:22:44.096" v="119"/>
-          <ac:picMkLst>
-            <pc:docMk/>
-            <pc:sldMk cId="0" sldId="269"/>
-            <ac:picMk id="29698" creationId="{00000000-0000-0000-0000-000000000000}"/>
-          </ac:picMkLst>
-        </pc:picChg>
-      </pc:sldChg>
-      <pc:sldChg chg="modSp add">
-        <pc:chgData name="Xin Zou" userId="260b9726081dae15" providerId="LiveId" clId="{46DFD426-ED4D-43B9-906F-4E50473E9166}" dt="2018-10-07T00:29:15.582" v="520" actId="27636"/>
-        <pc:sldMkLst>
-          <pc:docMk/>
-          <pc:sldMk cId="0" sldId="270"/>
-        </pc:sldMkLst>
-        <pc:spChg chg="mod">
-          <ac:chgData name="Xin Zou" userId="260b9726081dae15" providerId="LiveId" clId="{46DFD426-ED4D-43B9-906F-4E50473E9166}" dt="2018-10-07T00:29:15.582" v="520" actId="27636"/>
-          <ac:spMkLst>
-            <pc:docMk/>
-            <pc:sldMk cId="0" sldId="270"/>
-            <ac:spMk id="3" creationId="{00000000-0000-0000-0000-000000000000}"/>
-          </ac:spMkLst>
-        </pc:spChg>
-      </pc:sldChg>
-      <pc:sldChg chg="modSp">
-        <pc:chgData name="Xin Zou" userId="260b9726081dae15" providerId="LiveId" clId="{46DFD426-ED4D-43B9-906F-4E50473E9166}" dt="2018-10-06T23:22:44.969" v="131" actId="27636"/>
-        <pc:sldMkLst>
-          <pc:docMk/>
-          <pc:sldMk cId="0" sldId="271"/>
-        </pc:sldMkLst>
-        <pc:spChg chg="mod">
-          <ac:chgData name="Xin Zou" userId="260b9726081dae15" providerId="LiveId" clId="{46DFD426-ED4D-43B9-906F-4E50473E9166}" dt="2018-10-06T23:22:44.969" v="131" actId="27636"/>
-          <ac:spMkLst>
-            <pc:docMk/>
-            <pc:sldMk cId="0" sldId="271"/>
-            <ac:spMk id="3" creationId="{00000000-0000-0000-0000-000000000000}"/>
-          </ac:spMkLst>
-        </pc:spChg>
-      </pc:sldChg>
-      <pc:sldChg chg="modAnim">
-        <pc:chgData name="Xin Zou" userId="260b9726081dae15" providerId="LiveId" clId="{46DFD426-ED4D-43B9-906F-4E50473E9166}" dt="2018-10-06T23:22:44.096" v="119"/>
-        <pc:sldMkLst>
-          <pc:docMk/>
-          <pc:sldMk cId="0" sldId="272"/>
-        </pc:sldMkLst>
-      </pc:sldChg>
-      <pc:sldChg chg="add">
-        <pc:chgData name="Xin Zou" userId="260b9726081dae15" providerId="LiveId" clId="{46DFD426-ED4D-43B9-906F-4E50473E9166}" dt="2018-10-07T00:29:15.209" v="514"/>
-        <pc:sldMkLst>
-          <pc:docMk/>
-          <pc:sldMk cId="694464398" sldId="273"/>
-        </pc:sldMkLst>
-      </pc:sldChg>
-      <pc:sldChg chg="modSp">
-        <pc:chgData name="Xin Zou" userId="260b9726081dae15" providerId="LiveId" clId="{46DFD426-ED4D-43B9-906F-4E50473E9166}" dt="2018-10-06T23:22:44.096" v="119"/>
-        <pc:sldMkLst>
-          <pc:docMk/>
-          <pc:sldMk cId="0" sldId="274"/>
-        </pc:sldMkLst>
-        <pc:spChg chg="mod">
-          <ac:chgData name="Xin Zou" userId="260b9726081dae15" providerId="LiveId" clId="{46DFD426-ED4D-43B9-906F-4E50473E9166}" dt="2018-10-06T23:22:44.096" v="119"/>
-          <ac:spMkLst>
-            <pc:docMk/>
-            <pc:sldMk cId="0" sldId="274"/>
-            <ac:spMk id="4" creationId="{00000000-0000-0000-0000-000000000000}"/>
-          </ac:spMkLst>
-        </pc:spChg>
-        <pc:spChg chg="mod">
-          <ac:chgData name="Xin Zou" userId="260b9726081dae15" providerId="LiveId" clId="{46DFD426-ED4D-43B9-906F-4E50473E9166}" dt="2018-10-06T23:22:44.096" v="119"/>
-          <ac:spMkLst>
-            <pc:docMk/>
-            <pc:sldMk cId="0" sldId="274"/>
-            <ac:spMk id="5" creationId="{00000000-0000-0000-0000-000000000000}"/>
-          </ac:spMkLst>
-        </pc:spChg>
-        <pc:spChg chg="mod">
-          <ac:chgData name="Xin Zou" userId="260b9726081dae15" providerId="LiveId" clId="{46DFD426-ED4D-43B9-906F-4E50473E9166}" dt="2018-10-06T23:22:44.096" v="119"/>
-          <ac:spMkLst>
-            <pc:docMk/>
-            <pc:sldMk cId="0" sldId="274"/>
-            <ac:spMk id="6" creationId="{00000000-0000-0000-0000-000000000000}"/>
-          </ac:spMkLst>
-        </pc:spChg>
-        <pc:spChg chg="mod">
-          <ac:chgData name="Xin Zou" userId="260b9726081dae15" providerId="LiveId" clId="{46DFD426-ED4D-43B9-906F-4E50473E9166}" dt="2018-10-06T23:22:44.096" v="119"/>
-          <ac:spMkLst>
-            <pc:docMk/>
-            <pc:sldMk cId="0" sldId="274"/>
-            <ac:spMk id="7" creationId="{00000000-0000-0000-0000-000000000000}"/>
-          </ac:spMkLst>
-        </pc:spChg>
-      </pc:sldChg>
-      <pc:sldChg chg="modSp">
-        <pc:chgData name="Xin Zou" userId="260b9726081dae15" providerId="LiveId" clId="{46DFD426-ED4D-43B9-906F-4E50473E9166}" dt="2018-10-06T23:24:07.220" v="146" actId="27636"/>
-        <pc:sldMkLst>
-          <pc:docMk/>
-          <pc:sldMk cId="0" sldId="276"/>
-        </pc:sldMkLst>
-        <pc:spChg chg="mod">
-          <ac:chgData name="Xin Zou" userId="260b9726081dae15" providerId="LiveId" clId="{46DFD426-ED4D-43B9-906F-4E50473E9166}" dt="2018-10-06T23:24:07.220" v="146" actId="27636"/>
-          <ac:spMkLst>
-            <pc:docMk/>
-            <pc:sldMk cId="0" sldId="276"/>
-            <ac:spMk id="3" creationId="{00000000-0000-0000-0000-000000000000}"/>
-          </ac:spMkLst>
-        </pc:spChg>
-      </pc:sldChg>
-      <pc:sldChg chg="modSp">
-        <pc:chgData name="Xin Zou" userId="260b9726081dae15" providerId="LiveId" clId="{46DFD426-ED4D-43B9-906F-4E50473E9166}" dt="2018-10-06T23:12:47.457" v="53" actId="20577"/>
-        <pc:sldMkLst>
-          <pc:docMk/>
-          <pc:sldMk cId="0" sldId="277"/>
-        </pc:sldMkLst>
-        <pc:spChg chg="mod">
-          <ac:chgData name="Xin Zou" userId="260b9726081dae15" providerId="LiveId" clId="{46DFD426-ED4D-43B9-906F-4E50473E9166}" dt="2018-10-06T23:12:47.457" v="53" actId="20577"/>
-          <ac:spMkLst>
-            <pc:docMk/>
-            <pc:sldMk cId="0" sldId="277"/>
-            <ac:spMk id="3" creationId="{00000000-0000-0000-0000-000000000000}"/>
-          </ac:spMkLst>
-        </pc:spChg>
-      </pc:sldChg>
-      <pc:sldChg chg="modSp add del modTransition">
-        <pc:chgData name="Xin Zou" userId="260b9726081dae15" providerId="LiveId" clId="{46DFD426-ED4D-43B9-906F-4E50473E9166}" dt="2018-10-06T23:25:39.220" v="166"/>
+      <pc:sldChg chg="delSp mod">
+        <pc:chgData name="Xin Zou" userId="260b9726081dae15" providerId="LiveId" clId="{9D297BCE-98D2-4025-9670-F2ABFDE5436C}" dt="2026-05-06T12:43:26.480" v="1006" actId="478"/>
         <pc:sldMkLst>
           <pc:docMk/>
           <pc:sldMk cId="0" sldId="278"/>
         </pc:sldMkLst>
-        <pc:spChg chg="mod">
-          <ac:chgData name="Xin Zou" userId="260b9726081dae15" providerId="LiveId" clId="{46DFD426-ED4D-43B9-906F-4E50473E9166}" dt="2018-10-06T23:24:07.021" v="139" actId="27636"/>
+        <pc:spChg chg="del">
+          <ac:chgData name="Xin Zou" userId="260b9726081dae15" providerId="LiveId" clId="{9D297BCE-98D2-4025-9670-F2ABFDE5436C}" dt="2026-05-06T12:43:26.480" v="1006" actId="478"/>
           <ac:spMkLst>
             <pc:docMk/>
             <pc:sldMk cId="0" sldId="278"/>
-            <ac:spMk id="2" creationId="{00000000-0000-0000-0000-000000000000}"/>
-          </ac:spMkLst>
-        </pc:spChg>
-        <pc:graphicFrameChg chg="mod">
-          <ac:chgData name="Xin Zou" userId="260b9726081dae15" providerId="LiveId" clId="{46DFD426-ED4D-43B9-906F-4E50473E9166}" dt="2018-10-06T23:22:44.096" v="119"/>
-          <ac:graphicFrameMkLst>
-            <pc:docMk/>
-            <pc:sldMk cId="0" sldId="278"/>
-            <ac:graphicFrameMk id="4" creationId="{00000000-0000-0000-0000-000000000000}"/>
-          </ac:graphicFrameMkLst>
-        </pc:graphicFrameChg>
-      </pc:sldChg>
-      <pc:sldChg chg="modSp">
-        <pc:chgData name="Xin Zou" userId="260b9726081dae15" providerId="LiveId" clId="{46DFD426-ED4D-43B9-906F-4E50473E9166}" dt="2018-10-06T23:22:45.042" v="133" actId="27636"/>
-        <pc:sldMkLst>
-          <pc:docMk/>
-          <pc:sldMk cId="0" sldId="279"/>
-        </pc:sldMkLst>
-        <pc:spChg chg="mod">
-          <ac:chgData name="Xin Zou" userId="260b9726081dae15" providerId="LiveId" clId="{46DFD426-ED4D-43B9-906F-4E50473E9166}" dt="2018-10-06T23:22:45.042" v="133" actId="27636"/>
-          <ac:spMkLst>
-            <pc:docMk/>
-            <pc:sldMk cId="0" sldId="279"/>
-            <ac:spMk id="3" creationId="{00000000-0000-0000-0000-000000000000}"/>
-          </ac:spMkLst>
-        </pc:spChg>
-      </pc:sldChg>
-      <pc:sldChg chg="addSp modSp">
-        <pc:chgData name="Xin Zou" userId="260b9726081dae15" providerId="LiveId" clId="{46DFD426-ED4D-43B9-906F-4E50473E9166}" dt="2018-10-06T23:35:36.686" v="472" actId="20577"/>
-        <pc:sldMkLst>
-          <pc:docMk/>
-          <pc:sldMk cId="0" sldId="281"/>
-        </pc:sldMkLst>
-        <pc:spChg chg="mod">
-          <ac:chgData name="Xin Zou" userId="260b9726081dae15" providerId="LiveId" clId="{46DFD426-ED4D-43B9-906F-4E50473E9166}" dt="2018-10-06T23:35:36.686" v="472" actId="20577"/>
-          <ac:spMkLst>
-            <pc:docMk/>
-            <pc:sldMk cId="0" sldId="281"/>
-            <ac:spMk id="3" creationId="{00000000-0000-0000-0000-000000000000}"/>
-          </ac:spMkLst>
-        </pc:spChg>
-        <pc:spChg chg="add mod">
-          <ac:chgData name="Xin Zou" userId="260b9726081dae15" providerId="LiveId" clId="{46DFD426-ED4D-43B9-906F-4E50473E9166}" dt="2018-10-06T23:35:30.934" v="467" actId="113"/>
-          <ac:spMkLst>
-            <pc:docMk/>
-            <pc:sldMk cId="0" sldId="281"/>
-            <ac:spMk id="4" creationId="{E1FBD344-3558-4F9A-8582-20F723F5FC26}"/>
-          </ac:spMkLst>
-        </pc:spChg>
-      </pc:sldChg>
-      <pc:sldChg chg="modSp">
-        <pc:chgData name="Xin Zou" userId="260b9726081dae15" providerId="LiveId" clId="{46DFD426-ED4D-43B9-906F-4E50473E9166}" dt="2018-10-06T23:24:07.142" v="144" actId="27636"/>
-        <pc:sldMkLst>
-          <pc:docMk/>
-          <pc:sldMk cId="0" sldId="289"/>
-        </pc:sldMkLst>
-        <pc:spChg chg="mod">
-          <ac:chgData name="Xin Zou" userId="260b9726081dae15" providerId="LiveId" clId="{46DFD426-ED4D-43B9-906F-4E50473E9166}" dt="2018-10-06T23:24:07.142" v="144" actId="27636"/>
-          <ac:spMkLst>
-            <pc:docMk/>
-            <pc:sldMk cId="0" sldId="289"/>
-            <ac:spMk id="3" creationId="{00000000-0000-0000-0000-000000000000}"/>
-          </ac:spMkLst>
-        </pc:spChg>
-      </pc:sldChg>
-      <pc:sldChg chg="modSp">
-        <pc:chgData name="Xin Zou" userId="260b9726081dae15" providerId="LiveId" clId="{46DFD426-ED4D-43B9-906F-4E50473E9166}" dt="2018-10-06T23:24:07.182" v="145" actId="27636"/>
-        <pc:sldMkLst>
-          <pc:docMk/>
-          <pc:sldMk cId="0" sldId="290"/>
-        </pc:sldMkLst>
-        <pc:spChg chg="mod">
-          <ac:chgData name="Xin Zou" userId="260b9726081dae15" providerId="LiveId" clId="{46DFD426-ED4D-43B9-906F-4E50473E9166}" dt="2018-10-06T23:24:07.182" v="145" actId="27636"/>
-          <ac:spMkLst>
-            <pc:docMk/>
-            <pc:sldMk cId="0" sldId="290"/>
-            <ac:spMk id="3" creationId="{00000000-0000-0000-0000-000000000000}"/>
-          </ac:spMkLst>
-        </pc:spChg>
-      </pc:sldChg>
-      <pc:sldChg chg="modSp">
-        <pc:chgData name="Xin Zou" userId="260b9726081dae15" providerId="LiveId" clId="{46DFD426-ED4D-43B9-906F-4E50473E9166}" dt="2018-10-06T23:24:07.120" v="143" actId="27636"/>
-        <pc:sldMkLst>
-          <pc:docMk/>
-          <pc:sldMk cId="3152726598" sldId="295"/>
-        </pc:sldMkLst>
-        <pc:spChg chg="mod">
-          <ac:chgData name="Xin Zou" userId="260b9726081dae15" providerId="LiveId" clId="{46DFD426-ED4D-43B9-906F-4E50473E9166}" dt="2018-10-06T23:24:07.120" v="143" actId="27636"/>
-          <ac:spMkLst>
-            <pc:docMk/>
-            <pc:sldMk cId="3152726598" sldId="295"/>
-            <ac:spMk id="3" creationId="{00000000-0000-0000-0000-000000000000}"/>
-          </ac:spMkLst>
-        </pc:spChg>
-      </pc:sldChg>
-      <pc:sldChg chg="modSp">
-        <pc:chgData name="Xin Zou" userId="260b9726081dae15" providerId="LiveId" clId="{46DFD426-ED4D-43B9-906F-4E50473E9166}" dt="2018-10-06T23:22:44.096" v="119"/>
-        <pc:sldMkLst>
-          <pc:docMk/>
-          <pc:sldMk cId="3560693634" sldId="298"/>
-        </pc:sldMkLst>
-        <pc:picChg chg="mod">
-          <ac:chgData name="Xin Zou" userId="260b9726081dae15" providerId="LiveId" clId="{46DFD426-ED4D-43B9-906F-4E50473E9166}" dt="2018-10-06T23:22:44.096" v="119"/>
-          <ac:picMkLst>
-            <pc:docMk/>
-            <pc:sldMk cId="3560693634" sldId="298"/>
-            <ac:picMk id="4" creationId="{00000000-0000-0000-0000-000000000000}"/>
-          </ac:picMkLst>
-        </pc:picChg>
-      </pc:sldChg>
-      <pc:sldChg chg="modSp">
-        <pc:chgData name="Xin Zou" userId="260b9726081dae15" providerId="LiveId" clId="{46DFD426-ED4D-43B9-906F-4E50473E9166}" dt="2018-10-06T23:36:38.326" v="480" actId="20577"/>
-        <pc:sldMkLst>
-          <pc:docMk/>
-          <pc:sldMk cId="3037766885" sldId="299"/>
-        </pc:sldMkLst>
-        <pc:spChg chg="mod">
-          <ac:chgData name="Xin Zou" userId="260b9726081dae15" providerId="LiveId" clId="{46DFD426-ED4D-43B9-906F-4E50473E9166}" dt="2018-10-06T23:36:38.326" v="480" actId="20577"/>
-          <ac:spMkLst>
-            <pc:docMk/>
-            <pc:sldMk cId="3037766885" sldId="299"/>
-            <ac:spMk id="3" creationId="{00000000-0000-0000-0000-000000000000}"/>
-          </ac:spMkLst>
-        </pc:spChg>
-      </pc:sldChg>
-      <pc:sldChg chg="modSp">
-        <pc:chgData name="Xin Zou" userId="260b9726081dae15" providerId="LiveId" clId="{46DFD426-ED4D-43B9-906F-4E50473E9166}" dt="2018-10-06T23:22:44.096" v="119"/>
-        <pc:sldMkLst>
-          <pc:docMk/>
-          <pc:sldMk cId="2420103398" sldId="300"/>
-        </pc:sldMkLst>
-        <pc:picChg chg="mod">
-          <ac:chgData name="Xin Zou" userId="260b9726081dae15" providerId="LiveId" clId="{46DFD426-ED4D-43B9-906F-4E50473E9166}" dt="2018-10-06T23:22:44.096" v="119"/>
-          <ac:picMkLst>
-            <pc:docMk/>
-            <pc:sldMk cId="2420103398" sldId="300"/>
-            <ac:picMk id="4" creationId="{00000000-0000-0000-0000-000000000000}"/>
-          </ac:picMkLst>
-        </pc:picChg>
-      </pc:sldChg>
-      <pc:sldChg chg="modSp">
-        <pc:chgData name="Xin Zou" userId="260b9726081dae15" providerId="LiveId" clId="{46DFD426-ED4D-43B9-906F-4E50473E9166}" dt="2018-10-06T23:24:06.969" v="137" actId="27636"/>
-        <pc:sldMkLst>
-          <pc:docMk/>
-          <pc:sldMk cId="2458744346" sldId="302"/>
-        </pc:sldMkLst>
-        <pc:spChg chg="mod">
-          <ac:chgData name="Xin Zou" userId="260b9726081dae15" providerId="LiveId" clId="{46DFD426-ED4D-43B9-906F-4E50473E9166}" dt="2018-10-06T23:24:06.969" v="137" actId="27636"/>
-          <ac:spMkLst>
-            <pc:docMk/>
-            <pc:sldMk cId="2458744346" sldId="302"/>
-            <ac:spMk id="3" creationId="{00000000-0000-0000-0000-000000000000}"/>
-          </ac:spMkLst>
-        </pc:spChg>
-      </pc:sldChg>
-      <pc:sldChg chg="modSp">
-        <pc:chgData name="Xin Zou" userId="260b9726081dae15" providerId="LiveId" clId="{46DFD426-ED4D-43B9-906F-4E50473E9166}" dt="2018-10-06T23:22:44.096" v="119"/>
-        <pc:sldMkLst>
-          <pc:docMk/>
-          <pc:sldMk cId="3743463174" sldId="305"/>
-        </pc:sldMkLst>
-        <pc:picChg chg="mod">
-          <ac:chgData name="Xin Zou" userId="260b9726081dae15" providerId="LiveId" clId="{46DFD426-ED4D-43B9-906F-4E50473E9166}" dt="2018-10-06T23:22:44.096" v="119"/>
-          <ac:picMkLst>
-            <pc:docMk/>
-            <pc:sldMk cId="3743463174" sldId="305"/>
-            <ac:picMk id="4" creationId="{00000000-0000-0000-0000-000000000000}"/>
-          </ac:picMkLst>
-        </pc:picChg>
-      </pc:sldChg>
-      <pc:sldChg chg="modSp">
-        <pc:chgData name="Xin Zou" userId="260b9726081dae15" providerId="LiveId" clId="{46DFD426-ED4D-43B9-906F-4E50473E9166}" dt="2018-10-06T23:24:07.100" v="142" actId="27636"/>
-        <pc:sldMkLst>
-          <pc:docMk/>
-          <pc:sldMk cId="1107413892" sldId="306"/>
-        </pc:sldMkLst>
-        <pc:spChg chg="mod">
-          <ac:chgData name="Xin Zou" userId="260b9726081dae15" providerId="LiveId" clId="{46DFD426-ED4D-43B9-906F-4E50473E9166}" dt="2018-10-06T23:24:07.100" v="142" actId="27636"/>
-          <ac:spMkLst>
-            <pc:docMk/>
-            <pc:sldMk cId="1107413892" sldId="306"/>
-            <ac:spMk id="3" creationId="{00000000-0000-0000-0000-000000000000}"/>
-          </ac:spMkLst>
-        </pc:spChg>
-      </pc:sldChg>
-      <pc:sldChg chg="modSp">
-        <pc:chgData name="Xin Zou" userId="260b9726081dae15" providerId="LiveId" clId="{46DFD426-ED4D-43B9-906F-4E50473E9166}" dt="2018-10-06T23:24:07.062" v="141" actId="27636"/>
-        <pc:sldMkLst>
-          <pc:docMk/>
-          <pc:sldMk cId="1039949418" sldId="307"/>
-        </pc:sldMkLst>
-        <pc:spChg chg="mod">
-          <ac:chgData name="Xin Zou" userId="260b9726081dae15" providerId="LiveId" clId="{46DFD426-ED4D-43B9-906F-4E50473E9166}" dt="2018-10-06T23:24:07.062" v="141" actId="27636"/>
-          <ac:spMkLst>
-            <pc:docMk/>
-            <pc:sldMk cId="1039949418" sldId="307"/>
-            <ac:spMk id="3" creationId="{00000000-0000-0000-0000-000000000000}"/>
-          </ac:spMkLst>
-        </pc:spChg>
-      </pc:sldChg>
-      <pc:sldChg chg="modSp del">
-        <pc:chgData name="Xin Zou" userId="260b9726081dae15" providerId="LiveId" clId="{46DFD426-ED4D-43B9-906F-4E50473E9166}" dt="2018-10-22T02:42:21.823" v="789" actId="2696"/>
-        <pc:sldMkLst>
-          <pc:docMk/>
-          <pc:sldMk cId="212970708" sldId="308"/>
-        </pc:sldMkLst>
-        <pc:picChg chg="mod">
-          <ac:chgData name="Xin Zou" userId="260b9726081dae15" providerId="LiveId" clId="{46DFD426-ED4D-43B9-906F-4E50473E9166}" dt="2018-10-06T23:22:44.096" v="119"/>
-          <ac:picMkLst>
-            <pc:docMk/>
-            <pc:sldMk cId="212970708" sldId="308"/>
-            <ac:picMk id="4" creationId="{00000000-0000-0000-0000-000000000000}"/>
-          </ac:picMkLst>
-        </pc:picChg>
-      </pc:sldChg>
-      <pc:sldChg chg="modSp">
-        <pc:chgData name="Xin Zou" userId="260b9726081dae15" providerId="LiveId" clId="{46DFD426-ED4D-43B9-906F-4E50473E9166}" dt="2018-10-06T23:24:07.261" v="147" actId="27636"/>
-        <pc:sldMkLst>
-          <pc:docMk/>
-          <pc:sldMk cId="4139357929" sldId="309"/>
-        </pc:sldMkLst>
-        <pc:spChg chg="mod">
-          <ac:chgData name="Xin Zou" userId="260b9726081dae15" providerId="LiveId" clId="{46DFD426-ED4D-43B9-906F-4E50473E9166}" dt="2018-10-06T23:24:07.261" v="147" actId="27636"/>
-          <ac:spMkLst>
-            <pc:docMk/>
-            <pc:sldMk cId="4139357929" sldId="309"/>
-            <ac:spMk id="3" creationId="{00000000-0000-0000-0000-000000000000}"/>
-          </ac:spMkLst>
-        </pc:spChg>
-      </pc:sldChg>
-      <pc:sldChg chg="modSp">
-        <pc:chgData name="Xin Zou" userId="260b9726081dae15" providerId="LiveId" clId="{46DFD426-ED4D-43B9-906F-4E50473E9166}" dt="2018-10-06T23:22:45.099" v="135" actId="27636"/>
-        <pc:sldMkLst>
-          <pc:docMk/>
-          <pc:sldMk cId="3101830749" sldId="310"/>
-        </pc:sldMkLst>
-        <pc:spChg chg="mod">
-          <ac:chgData name="Xin Zou" userId="260b9726081dae15" providerId="LiveId" clId="{46DFD426-ED4D-43B9-906F-4E50473E9166}" dt="2018-10-06T23:22:45.099" v="135" actId="27636"/>
-          <ac:spMkLst>
-            <pc:docMk/>
-            <pc:sldMk cId="3101830749" sldId="310"/>
-            <ac:spMk id="3" creationId="{00000000-0000-0000-0000-000000000000}"/>
-          </ac:spMkLst>
-        </pc:spChg>
-      </pc:sldChg>
-      <pc:sldChg chg="modSp">
-        <pc:chgData name="Xin Zou" userId="260b9726081dae15" providerId="LiveId" clId="{46DFD426-ED4D-43B9-906F-4E50473E9166}" dt="2018-10-06T23:24:07.045" v="140" actId="27636"/>
-        <pc:sldMkLst>
-          <pc:docMk/>
-          <pc:sldMk cId="513356841" sldId="311"/>
-        </pc:sldMkLst>
-        <pc:spChg chg="mod">
-          <ac:chgData name="Xin Zou" userId="260b9726081dae15" providerId="LiveId" clId="{46DFD426-ED4D-43B9-906F-4E50473E9166}" dt="2018-10-06T23:24:07.045" v="140" actId="27636"/>
-          <ac:spMkLst>
-            <pc:docMk/>
-            <pc:sldMk cId="513356841" sldId="311"/>
-            <ac:spMk id="3" creationId="{00000000-0000-0000-0000-000000000000}"/>
-          </ac:spMkLst>
-        </pc:spChg>
-      </pc:sldChg>
-      <pc:sldChg chg="modSp add">
-        <pc:chgData name="Xin Zou" userId="260b9726081dae15" providerId="LiveId" clId="{46DFD426-ED4D-43B9-906F-4E50473E9166}" dt="2018-10-06T23:22:24.287" v="111" actId="5793"/>
-        <pc:sldMkLst>
-          <pc:docMk/>
-          <pc:sldMk cId="3810347148" sldId="314"/>
-        </pc:sldMkLst>
-        <pc:spChg chg="mod">
-          <ac:chgData name="Xin Zou" userId="260b9726081dae15" providerId="LiveId" clId="{46DFD426-ED4D-43B9-906F-4E50473E9166}" dt="2018-10-06T23:22:24.287" v="111" actId="5793"/>
-          <ac:spMkLst>
-            <pc:docMk/>
-            <pc:sldMk cId="3810347148" sldId="314"/>
-            <ac:spMk id="2" creationId="{500F9065-8A47-414F-A899-7D6BDAA95FC7}"/>
-          </ac:spMkLst>
-        </pc:spChg>
-      </pc:sldChg>
-      <pc:sldChg chg="modSp add del">
-        <pc:chgData name="Xin Zou" userId="260b9726081dae15" providerId="LiveId" clId="{46DFD426-ED4D-43B9-906F-4E50473E9166}" dt="2018-10-06T23:29:29.986" v="187" actId="20577"/>
-        <pc:sldMkLst>
-          <pc:docMk/>
-          <pc:sldMk cId="779593711" sldId="315"/>
-        </pc:sldMkLst>
-        <pc:spChg chg="mod">
-          <ac:chgData name="Xin Zou" userId="260b9726081dae15" providerId="LiveId" clId="{46DFD426-ED4D-43B9-906F-4E50473E9166}" dt="2018-10-06T23:29:29.986" v="187" actId="20577"/>
-          <ac:spMkLst>
-            <pc:docMk/>
-            <pc:sldMk cId="779593711" sldId="315"/>
-            <ac:spMk id="6" creationId="{4554A874-763A-4ADF-8936-C21AAC8BEED4}"/>
-          </ac:spMkLst>
-        </pc:spChg>
-        <pc:picChg chg="mod">
-          <ac:chgData name="Xin Zou" userId="260b9726081dae15" providerId="LiveId" clId="{46DFD426-ED4D-43B9-906F-4E50473E9166}" dt="2018-10-06T23:22:44.096" v="119"/>
-          <ac:picMkLst>
-            <pc:docMk/>
-            <pc:sldMk cId="779593711" sldId="315"/>
-            <ac:picMk id="4" creationId="{E727D6C7-A688-4938-B452-1327B2AC4430}"/>
-          </ac:picMkLst>
-        </pc:picChg>
-        <pc:picChg chg="mod">
-          <ac:chgData name="Xin Zou" userId="260b9726081dae15" providerId="LiveId" clId="{46DFD426-ED4D-43B9-906F-4E50473E9166}" dt="2018-10-06T23:22:44.096" v="119"/>
-          <ac:picMkLst>
-            <pc:docMk/>
-            <pc:sldMk cId="779593711" sldId="315"/>
-            <ac:picMk id="5" creationId="{5756F2F9-716D-433C-8690-2C1005A79CAF}"/>
-          </ac:picMkLst>
-        </pc:picChg>
-      </pc:sldChg>
-      <pc:sldChg chg="modSp add del mod setBg">
-        <pc:chgData name="Xin Zou" userId="260b9726081dae15" providerId="LiveId" clId="{46DFD426-ED4D-43B9-906F-4E50473E9166}" dt="2018-10-06T23:27:01.337" v="175"/>
-        <pc:sldMkLst>
-          <pc:docMk/>
-          <pc:sldMk cId="4157264002" sldId="316"/>
-        </pc:sldMkLst>
-        <pc:spChg chg="mod">
-          <ac:chgData name="Xin Zou" userId="260b9726081dae15" providerId="LiveId" clId="{46DFD426-ED4D-43B9-906F-4E50473E9166}" dt="2018-10-06T23:26:14.009" v="167" actId="26606"/>
-          <ac:spMkLst>
-            <pc:docMk/>
-            <pc:sldMk cId="4157264002" sldId="316"/>
-            <ac:spMk id="2" creationId="{1FCA48BF-9F56-4DE9-B5AF-8E9EF786CB1E}"/>
-          </ac:spMkLst>
-        </pc:spChg>
-        <pc:graphicFrameChg chg="mod modGraphic">
-          <ac:chgData name="Xin Zou" userId="260b9726081dae15" providerId="LiveId" clId="{46DFD426-ED4D-43B9-906F-4E50473E9166}" dt="2018-10-06T23:26:14.009" v="167" actId="26606"/>
-          <ac:graphicFrameMkLst>
-            <pc:docMk/>
-            <pc:sldMk cId="4157264002" sldId="316"/>
-            <ac:graphicFrameMk id="5" creationId="{632B0768-8581-4584-A418-A73F33953D77}"/>
-          </ac:graphicFrameMkLst>
-        </pc:graphicFrameChg>
-      </pc:sldChg>
-      <pc:sldChg chg="modSp add del">
-        <pc:chgData name="Xin Zou" userId="260b9726081dae15" providerId="LiveId" clId="{46DFD426-ED4D-43B9-906F-4E50473E9166}" dt="2018-10-06T23:34:05.188" v="430" actId="20577"/>
-        <pc:sldMkLst>
-          <pc:docMk/>
-          <pc:sldMk cId="2955640387" sldId="317"/>
-        </pc:sldMkLst>
-        <pc:spChg chg="mod">
-          <ac:chgData name="Xin Zou" userId="260b9726081dae15" providerId="LiveId" clId="{46DFD426-ED4D-43B9-906F-4E50473E9166}" dt="2018-10-06T23:24:07.288" v="148" actId="27636"/>
-          <ac:spMkLst>
-            <pc:docMk/>
-            <pc:sldMk cId="2955640387" sldId="317"/>
-            <ac:spMk id="3" creationId="{49CCEBB2-1F25-47D1-9BA6-1B0DF7B749B5}"/>
-          </ac:spMkLst>
-        </pc:spChg>
-        <pc:spChg chg="mod">
-          <ac:chgData name="Xin Zou" userId="260b9726081dae15" providerId="LiveId" clId="{46DFD426-ED4D-43B9-906F-4E50473E9166}" dt="2018-10-06T23:34:05.188" v="430" actId="20577"/>
-          <ac:spMkLst>
-            <pc:docMk/>
-            <pc:sldMk cId="2955640387" sldId="317"/>
-            <ac:spMk id="4" creationId="{C6B4CACC-9791-40CA-94B2-95A6E5F0AF5C}"/>
-          </ac:spMkLst>
-        </pc:spChg>
-        <pc:spChg chg="mod">
-          <ac:chgData name="Xin Zou" userId="260b9726081dae15" providerId="LiveId" clId="{46DFD426-ED4D-43B9-906F-4E50473E9166}" dt="2018-10-06T23:31:19.105" v="368"/>
-          <ac:spMkLst>
-            <pc:docMk/>
-            <pc:sldMk cId="2955640387" sldId="317"/>
-            <ac:spMk id="5" creationId="{770B0415-41E0-4046-88F7-46B73D52EEF9}"/>
-          </ac:spMkLst>
-        </pc:spChg>
-        <pc:spChg chg="mod">
-          <ac:chgData name="Xin Zou" userId="260b9726081dae15" providerId="LiveId" clId="{46DFD426-ED4D-43B9-906F-4E50473E9166}" dt="2018-10-06T23:22:44.096" v="119"/>
-          <ac:spMkLst>
-            <pc:docMk/>
-            <pc:sldMk cId="2955640387" sldId="317"/>
-            <ac:spMk id="6" creationId="{654211F0-1078-4FF2-8BE6-BC5D6BE13F5D}"/>
-          </ac:spMkLst>
-        </pc:spChg>
-      </pc:sldChg>
-      <pc:sldChg chg="modSp add del">
-        <pc:chgData name="Xin Zou" userId="260b9726081dae15" providerId="LiveId" clId="{46DFD426-ED4D-43B9-906F-4E50473E9166}" dt="2018-10-06T23:27:01.337" v="175"/>
-        <pc:sldMkLst>
-          <pc:docMk/>
-          <pc:sldMk cId="1796555868" sldId="318"/>
-        </pc:sldMkLst>
-        <pc:spChg chg="mod">
-          <ac:chgData name="Xin Zou" userId="260b9726081dae15" providerId="LiveId" clId="{46DFD426-ED4D-43B9-906F-4E50473E9166}" dt="2018-10-06T23:22:44.482" v="120" actId="27636"/>
-          <ac:spMkLst>
-            <pc:docMk/>
-            <pc:sldMk cId="1796555868" sldId="318"/>
-            <ac:spMk id="2" creationId="{2A4F1CC6-9C8D-4829-B5B5-1F57458A0188}"/>
-          </ac:spMkLst>
-        </pc:spChg>
-        <pc:spChg chg="mod">
-          <ac:chgData name="Xin Zou" userId="260b9726081dae15" providerId="LiveId" clId="{46DFD426-ED4D-43B9-906F-4E50473E9166}" dt="2018-10-06T23:24:07.301" v="149" actId="27636"/>
-          <ac:spMkLst>
-            <pc:docMk/>
-            <pc:sldMk cId="1796555868" sldId="318"/>
-            <ac:spMk id="3" creationId="{417E3E16-EC1F-473E-9D03-B236FE71E927}"/>
-          </ac:spMkLst>
-        </pc:spChg>
-        <pc:spChg chg="mod">
-          <ac:chgData name="Xin Zou" userId="260b9726081dae15" providerId="LiveId" clId="{46DFD426-ED4D-43B9-906F-4E50473E9166}" dt="2018-10-06T23:22:44.096" v="119"/>
-          <ac:spMkLst>
-            <pc:docMk/>
-            <pc:sldMk cId="1796555868" sldId="318"/>
-            <ac:spMk id="4" creationId="{38189547-FB59-4E3B-BC7D-BF8166DA650E}"/>
-          </ac:spMkLst>
-        </pc:spChg>
-        <pc:spChg chg="mod">
-          <ac:chgData name="Xin Zou" userId="260b9726081dae15" providerId="LiveId" clId="{46DFD426-ED4D-43B9-906F-4E50473E9166}" dt="2018-10-06T23:22:44.096" v="119"/>
-          <ac:spMkLst>
-            <pc:docMk/>
-            <pc:sldMk cId="1796555868" sldId="318"/>
-            <ac:spMk id="5" creationId="{C2123BF2-217F-48DB-B8A8-FF9D1DF6D618}"/>
-          </ac:spMkLst>
-        </pc:spChg>
-      </pc:sldChg>
-      <pc:sldChg chg="modSp add del setBg">
-        <pc:chgData name="Xin Zou" userId="260b9726081dae15" providerId="LiveId" clId="{46DFD426-ED4D-43B9-906F-4E50473E9166}" dt="2018-10-06T23:27:01.337" v="175"/>
-        <pc:sldMkLst>
-          <pc:docMk/>
-          <pc:sldMk cId="1649517711" sldId="319"/>
-        </pc:sldMkLst>
-        <pc:spChg chg="mod">
-          <ac:chgData name="Xin Zou" userId="260b9726081dae15" providerId="LiveId" clId="{46DFD426-ED4D-43B9-906F-4E50473E9166}" dt="2018-10-06T23:22:44.096" v="119"/>
-          <ac:spMkLst>
-            <pc:docMk/>
-            <pc:sldMk cId="1649517711" sldId="319"/>
-            <ac:spMk id="2" creationId="{54928D91-745E-4D7D-B7BA-554AD6FFF57F}"/>
-          </ac:spMkLst>
-        </pc:spChg>
-        <pc:spChg chg="mod">
-          <ac:chgData name="Xin Zou" userId="260b9726081dae15" providerId="LiveId" clId="{46DFD426-ED4D-43B9-906F-4E50473E9166}" dt="2018-10-06T23:24:07.349" v="152" actId="27636"/>
-          <ac:spMkLst>
-            <pc:docMk/>
-            <pc:sldMk cId="1649517711" sldId="319"/>
-            <ac:spMk id="3" creationId="{2D7E20C3-1186-435A-9E1F-6E0E5A1F892C}"/>
-          </ac:spMkLst>
-        </pc:spChg>
-        <pc:picChg chg="mod">
-          <ac:chgData name="Xin Zou" userId="260b9726081dae15" providerId="LiveId" clId="{46DFD426-ED4D-43B9-906F-4E50473E9166}" dt="2018-10-06T23:22:44.096" v="119"/>
-          <ac:picMkLst>
-            <pc:docMk/>
-            <pc:sldMk cId="1649517711" sldId="319"/>
-            <ac:picMk id="4" creationId="{1D438C04-2941-4588-AEF7-A45ECCE549A3}"/>
-          </ac:picMkLst>
-        </pc:picChg>
-      </pc:sldChg>
-      <pc:sldChg chg="modSp add del">
-        <pc:chgData name="Xin Zou" userId="260b9726081dae15" providerId="LiveId" clId="{46DFD426-ED4D-43B9-906F-4E50473E9166}" dt="2018-10-06T23:33:27.314" v="386" actId="6549"/>
-        <pc:sldMkLst>
-          <pc:docMk/>
-          <pc:sldMk cId="184108523" sldId="320"/>
-        </pc:sldMkLst>
-        <pc:spChg chg="mod">
-          <ac:chgData name="Xin Zou" userId="260b9726081dae15" providerId="LiveId" clId="{46DFD426-ED4D-43B9-906F-4E50473E9166}" dt="2018-10-06T23:24:07.320" v="150" actId="27636"/>
-          <ac:spMkLst>
-            <pc:docMk/>
-            <pc:sldMk cId="184108523" sldId="320"/>
-            <ac:spMk id="3" creationId="{417E3E16-EC1F-473E-9D03-B236FE71E927}"/>
-          </ac:spMkLst>
-        </pc:spChg>
-        <pc:spChg chg="mod">
-          <ac:chgData name="Xin Zou" userId="260b9726081dae15" providerId="LiveId" clId="{46DFD426-ED4D-43B9-906F-4E50473E9166}" dt="2018-10-06T23:33:27.314" v="386" actId="6549"/>
-          <ac:spMkLst>
-            <pc:docMk/>
-            <pc:sldMk cId="184108523" sldId="320"/>
-            <ac:spMk id="4" creationId="{38189547-FB59-4E3B-BC7D-BF8166DA650E}"/>
-          </ac:spMkLst>
-        </pc:spChg>
-        <pc:spChg chg="mod">
-          <ac:chgData name="Xin Zou" userId="260b9726081dae15" providerId="LiveId" clId="{46DFD426-ED4D-43B9-906F-4E50473E9166}" dt="2018-10-06T23:22:44.096" v="119"/>
-          <ac:spMkLst>
-            <pc:docMk/>
-            <pc:sldMk cId="184108523" sldId="320"/>
-            <ac:spMk id="5" creationId="{5898A5FC-C6FF-40F1-B769-0DECF4B361A4}"/>
-          </ac:spMkLst>
-        </pc:spChg>
-      </pc:sldChg>
-      <pc:sldChg chg="modSp add del">
-        <pc:chgData name="Xin Zou" userId="260b9726081dae15" providerId="LiveId" clId="{46DFD426-ED4D-43B9-906F-4E50473E9166}" dt="2018-10-06T23:33:40.211" v="397" actId="20577"/>
-        <pc:sldMkLst>
-          <pc:docMk/>
-          <pc:sldMk cId="2869472057" sldId="321"/>
-        </pc:sldMkLst>
-        <pc:spChg chg="mod">
-          <ac:chgData name="Xin Zou" userId="260b9726081dae15" providerId="LiveId" clId="{46DFD426-ED4D-43B9-906F-4E50473E9166}" dt="2018-10-06T23:24:07.333" v="151" actId="27636"/>
-          <ac:spMkLst>
-            <pc:docMk/>
-            <pc:sldMk cId="2869472057" sldId="321"/>
-            <ac:spMk id="3" creationId="{417E3E16-EC1F-473E-9D03-B236FE71E927}"/>
-          </ac:spMkLst>
-        </pc:spChg>
-        <pc:spChg chg="mod">
-          <ac:chgData name="Xin Zou" userId="260b9726081dae15" providerId="LiveId" clId="{46DFD426-ED4D-43B9-906F-4E50473E9166}" dt="2018-10-06T23:33:40.211" v="397" actId="20577"/>
-          <ac:spMkLst>
-            <pc:docMk/>
-            <pc:sldMk cId="2869472057" sldId="321"/>
-            <ac:spMk id="4" creationId="{38189547-FB59-4E3B-BC7D-BF8166DA650E}"/>
-          </ac:spMkLst>
-        </pc:spChg>
-        <pc:spChg chg="mod">
-          <ac:chgData name="Xin Zou" userId="260b9726081dae15" providerId="LiveId" clId="{46DFD426-ED4D-43B9-906F-4E50473E9166}" dt="2018-10-06T23:22:44.096" v="119"/>
-          <ac:spMkLst>
-            <pc:docMk/>
-            <pc:sldMk cId="2869472057" sldId="321"/>
-            <ac:spMk id="5" creationId="{5C837665-D6DB-495E-9BDE-92AB4245C467}"/>
-          </ac:spMkLst>
-        </pc:spChg>
-      </pc:sldChg>
-      <pc:sldChg chg="modSp add">
-        <pc:chgData name="Xin Zou" userId="260b9726081dae15" providerId="LiveId" clId="{46DFD426-ED4D-43B9-906F-4E50473E9166}" dt="2018-10-06T23:38:36.366" v="513" actId="20577"/>
-        <pc:sldMkLst>
-          <pc:docMk/>
-          <pc:sldMk cId="1136788009" sldId="322"/>
-        </pc:sldMkLst>
-        <pc:spChg chg="mod">
-          <ac:chgData name="Xin Zou" userId="260b9726081dae15" providerId="LiveId" clId="{46DFD426-ED4D-43B9-906F-4E50473E9166}" dt="2018-10-06T23:37:23.596" v="511"/>
-          <ac:spMkLst>
-            <pc:docMk/>
-            <pc:sldMk cId="1136788009" sldId="322"/>
-            <ac:spMk id="2" creationId="{C53B4456-2C2A-4A21-BC3F-141A0D4BE4D4}"/>
-          </ac:spMkLst>
-        </pc:spChg>
-        <pc:spChg chg="mod">
-          <ac:chgData name="Xin Zou" userId="260b9726081dae15" providerId="LiveId" clId="{46DFD426-ED4D-43B9-906F-4E50473E9166}" dt="2018-10-06T23:38:36.366" v="513" actId="20577"/>
-          <ac:spMkLst>
-            <pc:docMk/>
-            <pc:sldMk cId="1136788009" sldId="322"/>
-            <ac:spMk id="3" creationId="{24647FCB-119E-4B79-83F5-D9B25D19F51C}"/>
-          </ac:spMkLst>
-        </pc:spChg>
-      </pc:sldChg>
-      <pc:sldChg chg="add">
-        <pc:chgData name="Xin Zou" userId="260b9726081dae15" providerId="LiveId" clId="{46DFD426-ED4D-43B9-906F-4E50473E9166}" dt="2018-10-07T00:29:15.209" v="514"/>
-        <pc:sldMkLst>
-          <pc:docMk/>
-          <pc:sldMk cId="0" sldId="323"/>
-        </pc:sldMkLst>
-      </pc:sldChg>
-      <pc:sldChg chg="add">
-        <pc:chgData name="Xin Zou" userId="260b9726081dae15" providerId="LiveId" clId="{46DFD426-ED4D-43B9-906F-4E50473E9166}" dt="2018-10-07T00:29:15.209" v="514"/>
-        <pc:sldMkLst>
-          <pc:docMk/>
-          <pc:sldMk cId="3474084568" sldId="324"/>
-        </pc:sldMkLst>
-      </pc:sldChg>
-      <pc:sldChg chg="add">
-        <pc:chgData name="Xin Zou" userId="260b9726081dae15" providerId="LiveId" clId="{46DFD426-ED4D-43B9-906F-4E50473E9166}" dt="2018-10-07T00:29:15.209" v="514"/>
-        <pc:sldMkLst>
-          <pc:docMk/>
-          <pc:sldMk cId="2034699587" sldId="325"/>
-        </pc:sldMkLst>
-      </pc:sldChg>
-      <pc:sldChg chg="modSp add">
-        <pc:chgData name="Xin Zou" userId="260b9726081dae15" providerId="LiveId" clId="{46DFD426-ED4D-43B9-906F-4E50473E9166}" dt="2018-10-07T00:29:15.399" v="515" actId="27636"/>
-        <pc:sldMkLst>
-          <pc:docMk/>
-          <pc:sldMk cId="1728713882" sldId="326"/>
-        </pc:sldMkLst>
-        <pc:spChg chg="mod">
-          <ac:chgData name="Xin Zou" userId="260b9726081dae15" providerId="LiveId" clId="{46DFD426-ED4D-43B9-906F-4E50473E9166}" dt="2018-10-07T00:29:15.399" v="515" actId="27636"/>
-          <ac:spMkLst>
-            <pc:docMk/>
-            <pc:sldMk cId="1728713882" sldId="326"/>
-            <ac:spMk id="3" creationId="{00000000-0000-0000-0000-000000000000}"/>
-          </ac:spMkLst>
-        </pc:spChg>
-      </pc:sldChg>
-      <pc:sldChg chg="add del">
-        <pc:chgData name="Xin Zou" userId="260b9726081dae15" providerId="LiveId" clId="{46DFD426-ED4D-43B9-906F-4E50473E9166}" dt="2018-10-22T02:42:05.780" v="788" actId="2696"/>
-        <pc:sldMkLst>
-          <pc:docMk/>
-          <pc:sldMk cId="1246967057" sldId="327"/>
-        </pc:sldMkLst>
-      </pc:sldChg>
-      <pc:sldChg chg="modSp add">
-        <pc:chgData name="Xin Zou" userId="260b9726081dae15" providerId="LiveId" clId="{46DFD426-ED4D-43B9-906F-4E50473E9166}" dt="2018-10-07T00:29:45.797" v="527"/>
-        <pc:sldMkLst>
-          <pc:docMk/>
-          <pc:sldMk cId="742285823" sldId="328"/>
-        </pc:sldMkLst>
-        <pc:spChg chg="mod">
-          <ac:chgData name="Xin Zou" userId="260b9726081dae15" providerId="LiveId" clId="{46DFD426-ED4D-43B9-906F-4E50473E9166}" dt="2018-10-07T00:29:45.797" v="527"/>
-          <ac:spMkLst>
-            <pc:docMk/>
-            <pc:sldMk cId="742285823" sldId="328"/>
-            <ac:spMk id="3" creationId="{00000000-0000-0000-0000-000000000000}"/>
-          </ac:spMkLst>
-        </pc:spChg>
-      </pc:sldChg>
-      <pc:sldChg chg="modSp add">
-        <pc:chgData name="Xin Zou" userId="260b9726081dae15" providerId="LiveId" clId="{46DFD426-ED4D-43B9-906F-4E50473E9166}" dt="2018-10-07T00:29:15.501" v="517" actId="27636"/>
-        <pc:sldMkLst>
-          <pc:docMk/>
-          <pc:sldMk cId="3613035980" sldId="329"/>
-        </pc:sldMkLst>
-        <pc:spChg chg="mod">
-          <ac:chgData name="Xin Zou" userId="260b9726081dae15" providerId="LiveId" clId="{46DFD426-ED4D-43B9-906F-4E50473E9166}" dt="2018-10-07T00:29:15.501" v="517" actId="27636"/>
-          <ac:spMkLst>
-            <pc:docMk/>
-            <pc:sldMk cId="3613035980" sldId="329"/>
-            <ac:spMk id="3" creationId="{00000000-0000-0000-0000-000000000000}"/>
-          </ac:spMkLst>
-        </pc:spChg>
-      </pc:sldChg>
-      <pc:sldChg chg="add">
-        <pc:chgData name="Xin Zou" userId="260b9726081dae15" providerId="LiveId" clId="{46DFD426-ED4D-43B9-906F-4E50473E9166}" dt="2018-10-07T00:29:15.209" v="514"/>
-        <pc:sldMkLst>
-          <pc:docMk/>
-          <pc:sldMk cId="3870595207" sldId="330"/>
-        </pc:sldMkLst>
-      </pc:sldChg>
-      <pc:sldChg chg="modSp add">
-        <pc:chgData name="Xin Zou" userId="260b9726081dae15" providerId="LiveId" clId="{46DFD426-ED4D-43B9-906F-4E50473E9166}" dt="2018-10-07T00:29:15.529" v="518" actId="27636"/>
-        <pc:sldMkLst>
-          <pc:docMk/>
-          <pc:sldMk cId="0" sldId="331"/>
-        </pc:sldMkLst>
-        <pc:spChg chg="mod">
-          <ac:chgData name="Xin Zou" userId="260b9726081dae15" providerId="LiveId" clId="{46DFD426-ED4D-43B9-906F-4E50473E9166}" dt="2018-10-07T00:29:15.529" v="518" actId="27636"/>
-          <ac:spMkLst>
-            <pc:docMk/>
-            <pc:sldMk cId="0" sldId="331"/>
-            <ac:spMk id="3" creationId="{00000000-0000-0000-0000-000000000000}"/>
-          </ac:spMkLst>
-        </pc:spChg>
-      </pc:sldChg>
-      <pc:sldChg chg="add">
-        <pc:chgData name="Xin Zou" userId="260b9726081dae15" providerId="LiveId" clId="{46DFD426-ED4D-43B9-906F-4E50473E9166}" dt="2018-10-07T00:29:15.209" v="514"/>
-        <pc:sldMkLst>
-          <pc:docMk/>
-          <pc:sldMk cId="0" sldId="332"/>
-        </pc:sldMkLst>
-      </pc:sldChg>
-      <pc:sldChg chg="modSp add">
-        <pc:chgData name="Xin Zou" userId="260b9726081dae15" providerId="LiveId" clId="{46DFD426-ED4D-43B9-906F-4E50473E9166}" dt="2018-10-07T00:29:15.558" v="519" actId="27636"/>
-        <pc:sldMkLst>
-          <pc:docMk/>
-          <pc:sldMk cId="0" sldId="333"/>
-        </pc:sldMkLst>
-        <pc:spChg chg="mod">
-          <ac:chgData name="Xin Zou" userId="260b9726081dae15" providerId="LiveId" clId="{46DFD426-ED4D-43B9-906F-4E50473E9166}" dt="2018-10-07T00:29:15.558" v="519" actId="27636"/>
-          <ac:spMkLst>
-            <pc:docMk/>
-            <pc:sldMk cId="0" sldId="333"/>
-            <ac:spMk id="3" creationId="{00000000-0000-0000-0000-000000000000}"/>
-          </ac:spMkLst>
-        </pc:spChg>
-      </pc:sldChg>
-      <pc:sldChg chg="modSp add">
-        <pc:chgData name="Xin Zou" userId="260b9726081dae15" providerId="LiveId" clId="{46DFD426-ED4D-43B9-906F-4E50473E9166}" dt="2018-10-07T00:30:14.632" v="533" actId="313"/>
-        <pc:sldMkLst>
-          <pc:docMk/>
-          <pc:sldMk cId="0" sldId="334"/>
-        </pc:sldMkLst>
-        <pc:spChg chg="mod">
-          <ac:chgData name="Xin Zou" userId="260b9726081dae15" providerId="LiveId" clId="{46DFD426-ED4D-43B9-906F-4E50473E9166}" dt="2018-10-07T00:30:14.632" v="533" actId="313"/>
-          <ac:spMkLst>
-            <pc:docMk/>
-            <pc:sldMk cId="0" sldId="334"/>
-            <ac:spMk id="3" creationId="{00000000-0000-0000-0000-000000000000}"/>
-          </ac:spMkLst>
-        </pc:spChg>
-      </pc:sldChg>
-      <pc:sldChg chg="modSp add">
-        <pc:chgData name="Xin Zou" userId="260b9726081dae15" providerId="LiveId" clId="{46DFD426-ED4D-43B9-906F-4E50473E9166}" dt="2018-10-07T00:34:52.051" v="675"/>
-        <pc:sldMkLst>
-          <pc:docMk/>
-          <pc:sldMk cId="789073045" sldId="335"/>
-        </pc:sldMkLst>
-        <pc:spChg chg="mod">
-          <ac:chgData name="Xin Zou" userId="260b9726081dae15" providerId="LiveId" clId="{46DFD426-ED4D-43B9-906F-4E50473E9166}" dt="2018-10-07T00:32:18.595" v="580"/>
-          <ac:spMkLst>
-            <pc:docMk/>
-            <pc:sldMk cId="789073045" sldId="335"/>
-            <ac:spMk id="2" creationId="{DBC0037C-772E-407B-9C2D-7FF88F7F6B5B}"/>
-          </ac:spMkLst>
-        </pc:spChg>
-        <pc:spChg chg="mod">
-          <ac:chgData name="Xin Zou" userId="260b9726081dae15" providerId="LiveId" clId="{46DFD426-ED4D-43B9-906F-4E50473E9166}" dt="2018-10-07T00:34:52.051" v="675"/>
-          <ac:spMkLst>
-            <pc:docMk/>
-            <pc:sldMk cId="789073045" sldId="335"/>
-            <ac:spMk id="3" creationId="{47051AA4-B2FD-4D05-9D15-7A63447C65AB}"/>
-          </ac:spMkLst>
-        </pc:spChg>
-      </pc:sldChg>
-    </pc:docChg>
-  </pc:docChgLst>
-  <pc:docChgLst>
-    <pc:chgData name="Xin Zou" userId="260b9726081dae15" providerId="LiveId" clId="{A2813A9E-22ED-458D-9690-FC62CFE1BB3E}"/>
-    <pc:docChg chg="custSel modSld">
-      <pc:chgData name="Xin Zou" userId="260b9726081dae15" providerId="LiveId" clId="{A2813A9E-22ED-458D-9690-FC62CFE1BB3E}" dt="2019-09-04T07:44:56.522" v="121" actId="20577"/>
-      <pc:docMkLst>
-        <pc:docMk/>
-      </pc:docMkLst>
-      <pc:sldChg chg="modSp">
-        <pc:chgData name="Xin Zou" userId="260b9726081dae15" providerId="LiveId" clId="{A2813A9E-22ED-458D-9690-FC62CFE1BB3E}" dt="2019-09-04T07:44:56.522" v="121" actId="20577"/>
-        <pc:sldMkLst>
-          <pc:docMk/>
-          <pc:sldMk cId="3101830749" sldId="310"/>
-        </pc:sldMkLst>
-        <pc:spChg chg="mod">
-          <ac:chgData name="Xin Zou" userId="260b9726081dae15" providerId="LiveId" clId="{A2813A9E-22ED-458D-9690-FC62CFE1BB3E}" dt="2019-09-04T07:44:56.522" v="121" actId="20577"/>
-          <ac:spMkLst>
-            <pc:docMk/>
-            <pc:sldMk cId="3101830749" sldId="310"/>
             <ac:spMk id="3" creationId="{00000000-0000-0000-0000-000000000000}"/>
           </ac:spMkLst>
         </pc:spChg>
@@ -4295,7 +3347,7 @@
             <a:fld id="{6455661B-2E2A-4413-A8EF-12FE8F14696A}" type="datetimeFigureOut">
               <a:rPr lang="en-US" smtClean="0"/>
               <a:pPr/>
-              <a:t>9/4/2019</a:t>
+              <a:t>5/6/2026</a:t>
             </a:fld>
             <a:endParaRPr lang="en-US"/>
           </a:p>
@@ -5447,7 +4499,7 @@
                 <a:tabLst/>
                 <a:defRPr/>
               </a:pPr>
-              <a:t>50</a:t>
+              <a:t>51</a:t>
             </a:fld>
             <a:endParaRPr kumimoji="0" lang="en-US" sz="1200" b="0" i="0" u="none" strike="noStrike" kern="1200" cap="none" spc="0" normalizeH="0" baseline="0" noProof="0">
               <a:ln>
@@ -5675,7 +4727,7 @@
           <a:p>
             <a:fld id="{48A87A34-81AB-432B-8DAE-1953F412C126}" type="datetimeFigureOut">
               <a:rPr lang="en-US" smtClean="0"/>
-              <a:t>9/4/2019</a:t>
+              <a:t>5/6/2026</a:t>
             </a:fld>
             <a:endParaRPr lang="en-US" dirty="0"/>
           </a:p>
@@ -5957,7 +5009,7 @@
             <a:fld id="{48A87A34-81AB-432B-8DAE-1953F412C126}" type="datetimeFigureOut">
               <a:rPr lang="en-US" smtClean="0"/>
               <a:pPr/>
-              <a:t>9/4/2019</a:t>
+              <a:t>5/6/2026</a:t>
             </a:fld>
             <a:endParaRPr lang="en-US" dirty="0"/>
           </a:p>
@@ -6151,7 +5203,7 @@
             <a:fld id="{48A87A34-81AB-432B-8DAE-1953F412C126}" type="datetimeFigureOut">
               <a:rPr lang="en-US" smtClean="0"/>
               <a:pPr/>
-              <a:t>9/4/2019</a:t>
+              <a:t>5/6/2026</a:t>
             </a:fld>
             <a:endParaRPr lang="en-US" dirty="0"/>
           </a:p>
@@ -6414,7 +5466,7 @@
             <a:fld id="{48A87A34-81AB-432B-8DAE-1953F412C126}" type="datetimeFigureOut">
               <a:rPr lang="en-US" smtClean="0"/>
               <a:pPr/>
-              <a:t>9/4/2019</a:t>
+              <a:t>5/6/2026</a:t>
             </a:fld>
             <a:endParaRPr lang="en-US" dirty="0"/>
           </a:p>
@@ -6842,7 +5894,7 @@
             <a:fld id="{48A87A34-81AB-432B-8DAE-1953F412C126}" type="datetimeFigureOut">
               <a:rPr lang="en-US" smtClean="0"/>
               <a:pPr/>
-              <a:t>9/4/2019</a:t>
+              <a:t>5/6/2026</a:t>
             </a:fld>
             <a:endParaRPr lang="en-US" dirty="0"/>
           </a:p>
@@ -7390,7 +6442,7 @@
             <a:fld id="{48A87A34-81AB-432B-8DAE-1953F412C126}" type="datetimeFigureOut">
               <a:rPr lang="en-US" smtClean="0"/>
               <a:pPr/>
-              <a:t>9/4/2019</a:t>
+              <a:t>5/6/2026</a:t>
             </a:fld>
             <a:endParaRPr lang="en-US" dirty="0"/>
           </a:p>
@@ -8223,7 +7275,7 @@
             <a:fld id="{48A87A34-81AB-432B-8DAE-1953F412C126}" type="datetimeFigureOut">
               <a:rPr lang="en-US" smtClean="0"/>
               <a:pPr/>
-              <a:t>9/4/2019</a:t>
+              <a:t>5/6/2026</a:t>
             </a:fld>
             <a:endParaRPr lang="en-US" dirty="0"/>
           </a:p>
@@ -8394,7 +7446,7 @@
           <a:p>
             <a:fld id="{48A87A34-81AB-432B-8DAE-1953F412C126}" type="datetimeFigureOut">
               <a:rPr lang="en-US" smtClean="0"/>
-              <a:t>9/4/2019</a:t>
+              <a:t>5/6/2026</a:t>
             </a:fld>
             <a:endParaRPr lang="en-US" dirty="0"/>
           </a:p>
@@ -8574,7 +7626,7 @@
           <a:p>
             <a:fld id="{48A87A34-81AB-432B-8DAE-1953F412C126}" type="datetimeFigureOut">
               <a:rPr lang="en-US" smtClean="0"/>
-              <a:t>9/4/2019</a:t>
+              <a:t>5/6/2026</a:t>
             </a:fld>
             <a:endParaRPr lang="en-US" dirty="0"/>
           </a:p>
@@ -8831,7 +7883,7 @@
           <a:p>
             <a:fld id="{48A87A34-81AB-432B-8DAE-1953F412C126}" type="datetimeFigureOut">
               <a:rPr lang="en-US" smtClean="0"/>
-              <a:t>9/4/2019</a:t>
+              <a:t>5/6/2026</a:t>
             </a:fld>
             <a:endParaRPr lang="en-US" dirty="0"/>
           </a:p>
@@ -9001,7 +8053,7 @@
           <a:p>
             <a:fld id="{48A87A34-81AB-432B-8DAE-1953F412C126}" type="datetimeFigureOut">
               <a:rPr lang="en-US" smtClean="0"/>
-              <a:t>9/4/2019</a:t>
+              <a:t>5/6/2026</a:t>
             </a:fld>
             <a:endParaRPr lang="en-US" dirty="0"/>
           </a:p>
@@ -9171,7 +8223,7 @@
           <a:p>
             <a:fld id="{48A87A34-81AB-432B-8DAE-1953F412C126}" type="datetimeFigureOut">
               <a:rPr lang="en-US" smtClean="0"/>
-              <a:t>9/4/2019</a:t>
+              <a:t>5/6/2026</a:t>
             </a:fld>
             <a:endParaRPr lang="en-US" dirty="0"/>
           </a:p>
@@ -9428,7 +8480,7 @@
           <a:p>
             <a:fld id="{48A87A34-81AB-432B-8DAE-1953F412C126}" type="datetimeFigureOut">
               <a:rPr lang="en-US" smtClean="0"/>
-              <a:t>9/4/2019</a:t>
+              <a:t>5/6/2026</a:t>
             </a:fld>
             <a:endParaRPr lang="en-US" dirty="0"/>
           </a:p>
@@ -9660,7 +8712,7 @@
           <a:p>
             <a:fld id="{48A87A34-81AB-432B-8DAE-1953F412C126}" type="datetimeFigureOut">
               <a:rPr lang="en-US" smtClean="0"/>
-              <a:t>9/4/2019</a:t>
+              <a:t>5/6/2026</a:t>
             </a:fld>
             <a:endParaRPr lang="en-US" dirty="0"/>
           </a:p>
@@ -10053,7 +9105,7 @@
           <a:p>
             <a:fld id="{48A87A34-81AB-432B-8DAE-1953F412C126}" type="datetimeFigureOut">
               <a:rPr lang="en-US" smtClean="0"/>
-              <a:t>9/4/2019</a:t>
+              <a:t>5/6/2026</a:t>
             </a:fld>
             <a:endParaRPr lang="en-US" dirty="0"/>
           </a:p>
@@ -10171,7 +9223,7 @@
           <a:p>
             <a:fld id="{48A87A34-81AB-432B-8DAE-1953F412C126}" type="datetimeFigureOut">
               <a:rPr lang="en-US" smtClean="0"/>
-              <a:t>9/4/2019</a:t>
+              <a:t>5/6/2026</a:t>
             </a:fld>
             <a:endParaRPr lang="en-US" dirty="0"/>
           </a:p>
@@ -10266,7 +9318,7 @@
           <a:p>
             <a:fld id="{48A87A34-81AB-432B-8DAE-1953F412C126}" type="datetimeFigureOut">
               <a:rPr lang="en-US" smtClean="0"/>
-              <a:t>9/4/2019</a:t>
+              <a:t>5/6/2026</a:t>
             </a:fld>
             <a:endParaRPr lang="en-US" dirty="0"/>
           </a:p>
@@ -10539,7 +9591,7 @@
           <a:p>
             <a:fld id="{48A87A34-81AB-432B-8DAE-1953F412C126}" type="datetimeFigureOut">
               <a:rPr lang="en-US" smtClean="0"/>
-              <a:t>9/4/2019</a:t>
+              <a:t>5/6/2026</a:t>
             </a:fld>
             <a:endParaRPr lang="en-US" dirty="0"/>
           </a:p>
@@ -10820,7 +9872,7 @@
           <a:p>
             <a:fld id="{48A87A34-81AB-432B-8DAE-1953F412C126}" type="datetimeFigureOut">
               <a:rPr lang="en-US" smtClean="0"/>
-              <a:t>9/4/2019</a:t>
+              <a:t>5/6/2026</a:t>
             </a:fld>
             <a:endParaRPr lang="en-US" dirty="0"/>
           </a:p>
@@ -11102,7 +10154,7 @@
             <a:fld id="{48A87A34-81AB-432B-8DAE-1953F412C126}" type="datetimeFigureOut">
               <a:rPr lang="en-US" smtClean="0"/>
               <a:pPr/>
-              <a:t>9/4/2019</a:t>
+              <a:t>5/6/2026</a:t>
             </a:fld>
             <a:endParaRPr lang="en-US" dirty="0"/>
           </a:p>
@@ -11296,7 +10348,7 @@
             <a:fld id="{48A87A34-81AB-432B-8DAE-1953F412C126}" type="datetimeFigureOut">
               <a:rPr lang="en-US" smtClean="0"/>
               <a:pPr/>
-              <a:t>9/4/2019</a:t>
+              <a:t>5/6/2026</a:t>
             </a:fld>
             <a:endParaRPr lang="en-US" dirty="0"/>
           </a:p>
@@ -11559,7 +10611,7 @@
             <a:fld id="{48A87A34-81AB-432B-8DAE-1953F412C126}" type="datetimeFigureOut">
               <a:rPr lang="en-US" smtClean="0"/>
               <a:pPr/>
-              <a:t>9/4/2019</a:t>
+              <a:t>5/6/2026</a:t>
             </a:fld>
             <a:endParaRPr lang="en-US" dirty="0"/>
           </a:p>
@@ -12049,7 +11101,7 @@
           <a:p>
             <a:fld id="{48A87A34-81AB-432B-8DAE-1953F412C126}" type="datetimeFigureOut">
               <a:rPr lang="en-US" smtClean="0"/>
-              <a:t>9/4/2019</a:t>
+              <a:t>5/6/2026</a:t>
             </a:fld>
             <a:endParaRPr lang="en-US" dirty="0"/>
           </a:p>
@@ -12244,7 +11296,7 @@
             <a:fld id="{48A87A34-81AB-432B-8DAE-1953F412C126}" type="datetimeFigureOut">
               <a:rPr lang="en-US" smtClean="0"/>
               <a:pPr/>
-              <a:t>9/4/2019</a:t>
+              <a:t>5/6/2026</a:t>
             </a:fld>
             <a:endParaRPr lang="en-US" dirty="0"/>
           </a:p>
@@ -12792,7 +11844,7 @@
             <a:fld id="{48A87A34-81AB-432B-8DAE-1953F412C126}" type="datetimeFigureOut">
               <a:rPr lang="en-US" smtClean="0"/>
               <a:pPr/>
-              <a:t>9/4/2019</a:t>
+              <a:t>5/6/2026</a:t>
             </a:fld>
             <a:endParaRPr lang="en-US" dirty="0"/>
           </a:p>
@@ -13625,7 +12677,7 @@
             <a:fld id="{48A87A34-81AB-432B-8DAE-1953F412C126}" type="datetimeFigureOut">
               <a:rPr lang="en-US" smtClean="0"/>
               <a:pPr/>
-              <a:t>9/4/2019</a:t>
+              <a:t>5/6/2026</a:t>
             </a:fld>
             <a:endParaRPr lang="en-US" dirty="0"/>
           </a:p>
@@ -13796,7 +12848,7 @@
           <a:p>
             <a:fld id="{48A87A34-81AB-432B-8DAE-1953F412C126}" type="datetimeFigureOut">
               <a:rPr lang="en-US" smtClean="0"/>
-              <a:t>9/4/2019</a:t>
+              <a:t>5/6/2026</a:t>
             </a:fld>
             <a:endParaRPr lang="en-US" dirty="0"/>
           </a:p>
@@ -13976,7 +13028,7 @@
           <a:p>
             <a:fld id="{48A87A34-81AB-432B-8DAE-1953F412C126}" type="datetimeFigureOut">
               <a:rPr lang="en-US" smtClean="0"/>
-              <a:t>9/4/2019</a:t>
+              <a:t>5/6/2026</a:t>
             </a:fld>
             <a:endParaRPr lang="en-US" dirty="0"/>
           </a:p>
@@ -14208,7 +13260,7 @@
           <a:p>
             <a:fld id="{48A87A34-81AB-432B-8DAE-1953F412C126}" type="datetimeFigureOut">
               <a:rPr lang="en-US" smtClean="0"/>
-              <a:t>9/4/2019</a:t>
+              <a:t>5/6/2026</a:t>
             </a:fld>
             <a:endParaRPr lang="en-US" dirty="0"/>
           </a:p>
@@ -14601,7 +13653,7 @@
           <a:p>
             <a:fld id="{48A87A34-81AB-432B-8DAE-1953F412C126}" type="datetimeFigureOut">
               <a:rPr lang="en-US" smtClean="0"/>
-              <a:t>9/4/2019</a:t>
+              <a:t>5/6/2026</a:t>
             </a:fld>
             <a:endParaRPr lang="en-US" dirty="0"/>
           </a:p>
@@ -14719,7 +13771,7 @@
           <a:p>
             <a:fld id="{48A87A34-81AB-432B-8DAE-1953F412C126}" type="datetimeFigureOut">
               <a:rPr lang="en-US" smtClean="0"/>
-              <a:t>9/4/2019</a:t>
+              <a:t>5/6/2026</a:t>
             </a:fld>
             <a:endParaRPr lang="en-US" dirty="0"/>
           </a:p>
@@ -14814,7 +13866,7 @@
           <a:p>
             <a:fld id="{48A87A34-81AB-432B-8DAE-1953F412C126}" type="datetimeFigureOut">
               <a:rPr lang="en-US" smtClean="0"/>
-              <a:t>9/4/2019</a:t>
+              <a:t>5/6/2026</a:t>
             </a:fld>
             <a:endParaRPr lang="en-US" dirty="0"/>
           </a:p>
@@ -15087,7 +14139,7 @@
           <a:p>
             <a:fld id="{48A87A34-81AB-432B-8DAE-1953F412C126}" type="datetimeFigureOut">
               <a:rPr lang="en-US" smtClean="0"/>
-              <a:t>9/4/2019</a:t>
+              <a:t>5/6/2026</a:t>
             </a:fld>
             <a:endParaRPr lang="en-US" dirty="0"/>
           </a:p>
@@ -15368,7 +14420,7 @@
           <a:p>
             <a:fld id="{48A87A34-81AB-432B-8DAE-1953F412C126}" type="datetimeFigureOut">
               <a:rPr lang="en-US" smtClean="0"/>
-              <a:t>9/4/2019</a:t>
+              <a:t>5/6/2026</a:t>
             </a:fld>
             <a:endParaRPr lang="en-US" dirty="0"/>
           </a:p>
@@ -15609,7 +14661,7 @@
             <a:fld id="{48A87A34-81AB-432B-8DAE-1953F412C126}" type="datetimeFigureOut">
               <a:rPr lang="en-US" smtClean="0"/>
               <a:pPr/>
-              <a:t>9/4/2019</a:t>
+              <a:t>5/6/2026</a:t>
             </a:fld>
             <a:endParaRPr lang="en-US" dirty="0"/>
           </a:p>
@@ -16335,7 +15387,7 @@
             <a:fld id="{48A87A34-81AB-432B-8DAE-1953F412C126}" type="datetimeFigureOut">
               <a:rPr lang="en-US" smtClean="0"/>
               <a:pPr/>
-              <a:t>9/4/2019</a:t>
+              <a:t>5/6/2026</a:t>
             </a:fld>
             <a:endParaRPr lang="en-US" dirty="0"/>
           </a:p>
@@ -17042,26 +16094,6 @@
               <a:rPr lang="en-US" altLang="zh-CN" dirty="0"/>
               <a:t>Project Manager vs. Program Manager</a:t>
             </a:r>
-            <a:endParaRPr lang="en-US" dirty="0"/>
-          </a:p>
-        </p:txBody>
-      </p:sp>
-      <p:sp>
-        <p:nvSpPr>
-          <p:cNvPr id="3" name="Content Placeholder 2"/>
-          <p:cNvSpPr>
-            <a:spLocks noGrp="1"/>
-          </p:cNvSpPr>
-          <p:nvPr>
-            <p:ph idx="1"/>
-          </p:nvPr>
-        </p:nvSpPr>
-        <p:spPr/>
-        <p:txBody>
-          <a:bodyPr/>
-          <a:lstStyle/>
-          <a:p>
-            <a:pPr lvl="1"/>
             <a:endParaRPr lang="en-US" dirty="0"/>
           </a:p>
         </p:txBody>
@@ -27899,14 +26931,14 @@
           <a:lstStyle/>
           <a:p>
             <a:r>
-              <a:rPr lang="zh-CN" altLang="en-US">
+              <a:rPr lang="zh-CN" altLang="en-US" dirty="0">
                 <a:solidFill>
                   <a:schemeClr val="tx1"/>
                 </a:solidFill>
               </a:rPr>
-              <a:t>有效地开会（培训）</a:t>
-            </a:r>
-            <a:endParaRPr lang="en-US">
+              <a:t>有效地开会（练习）</a:t>
+            </a:r>
+            <a:endParaRPr lang="en-US" dirty="0">
               <a:solidFill>
                 <a:schemeClr val="tx1"/>
               </a:solidFill>
@@ -28105,6 +27137,274 @@
 </file>
 
 <file path=ppt/slides/slide50.xml><?xml version="1.0" encoding="utf-8"?>
+<p:sld xmlns:a="http://schemas.openxmlformats.org/drawingml/2006/main" xmlns:r="http://schemas.openxmlformats.org/officeDocument/2006/relationships" xmlns:p="http://schemas.openxmlformats.org/presentationml/2006/main">
+  <p:cSld>
+    <p:spTree>
+      <p:nvGrpSpPr>
+        <p:cNvPr id="1" name=""/>
+        <p:cNvGrpSpPr/>
+        <p:nvPr/>
+      </p:nvGrpSpPr>
+      <p:grpSpPr>
+        <a:xfrm>
+          <a:off x="0" y="0"/>
+          <a:ext cx="0" cy="0"/>
+          <a:chOff x="0" y="0"/>
+          <a:chExt cx="0" cy="0"/>
+        </a:xfrm>
+      </p:grpSpPr>
+      <p:sp>
+        <p:nvSpPr>
+          <p:cNvPr id="2" name="标题 1">
+            <a:extLst>
+              <a:ext uri="{FF2B5EF4-FFF2-40B4-BE49-F238E27FC236}">
+                <a16:creationId xmlns:a16="http://schemas.microsoft.com/office/drawing/2014/main" id="{47C15956-455B-70D8-2BAD-18640D77CA56}"/>
+              </a:ext>
+            </a:extLst>
+          </p:cNvPr>
+          <p:cNvSpPr>
+            <a:spLocks noGrp="1"/>
+          </p:cNvSpPr>
+          <p:nvPr>
+            <p:ph type="title"/>
+          </p:nvPr>
+        </p:nvSpPr>
+        <p:spPr/>
+        <p:txBody>
+          <a:bodyPr/>
+          <a:lstStyle/>
+          <a:p>
+            <a:r>
+              <a:rPr lang="en-US" altLang="zh-CN" dirty="0"/>
+              <a:t>Mid-Postmortem about this class</a:t>
+            </a:r>
+            <a:endParaRPr lang="zh-CN" altLang="en-US" dirty="0"/>
+          </a:p>
+        </p:txBody>
+      </p:sp>
+      <p:sp>
+        <p:nvSpPr>
+          <p:cNvPr id="3" name="内容占位符 2">
+            <a:extLst>
+              <a:ext uri="{FF2B5EF4-FFF2-40B4-BE49-F238E27FC236}">
+                <a16:creationId xmlns:a16="http://schemas.microsoft.com/office/drawing/2014/main" id="{8BF145A3-EAA2-AD77-9E8E-1A5632E91B99}"/>
+              </a:ext>
+            </a:extLst>
+          </p:cNvPr>
+          <p:cNvSpPr>
+            <a:spLocks noGrp="1"/>
+          </p:cNvSpPr>
+          <p:nvPr>
+            <p:ph idx="1"/>
+          </p:nvPr>
+        </p:nvSpPr>
+        <p:spPr/>
+        <p:txBody>
+          <a:bodyPr>
+            <a:normAutofit fontScale="92500" lnSpcReduction="20000"/>
+          </a:bodyPr>
+          <a:lstStyle/>
+          <a:p>
+            <a:r>
+              <a:rPr lang="zh-CN" altLang="en-US" dirty="0"/>
+              <a:t>如果 </a:t>
+            </a:r>
+            <a:r>
+              <a:rPr lang="en-US" altLang="zh-CN" dirty="0"/>
+              <a:t>…</a:t>
+            </a:r>
+            <a:r>
+              <a:rPr lang="zh-CN" altLang="en-US" dirty="0"/>
+              <a:t> 再来一遍， 希望停止做 </a:t>
+            </a:r>
+            <a:r>
+              <a:rPr lang="en-US" altLang="zh-CN" dirty="0"/>
+              <a:t>| </a:t>
+            </a:r>
+            <a:r>
+              <a:rPr lang="zh-CN" altLang="en-US" dirty="0"/>
+              <a:t>继续做 </a:t>
+            </a:r>
+            <a:r>
+              <a:rPr lang="en-US" altLang="zh-CN" dirty="0"/>
+              <a:t>| </a:t>
+            </a:r>
+            <a:r>
+              <a:rPr lang="zh-CN" altLang="en-US" dirty="0"/>
+              <a:t>做新的</a:t>
+            </a:r>
+            <a:r>
+              <a:rPr lang="en-US" altLang="zh-CN" dirty="0"/>
+              <a:t> … </a:t>
+            </a:r>
+            <a:r>
+              <a:rPr lang="zh-CN" altLang="en-US" dirty="0"/>
+              <a:t>事情</a:t>
+            </a:r>
+            <a:endParaRPr lang="en-US" altLang="zh-CN" dirty="0"/>
+          </a:p>
+          <a:p>
+            <a:pPr lvl="1"/>
+            <a:r>
+              <a:rPr lang="zh-CN" altLang="en-US" dirty="0"/>
+              <a:t>你希望在这个课程中，你会 </a:t>
+            </a:r>
+            <a:r>
+              <a:rPr lang="en-US" altLang="zh-CN" dirty="0"/>
+              <a:t> </a:t>
+            </a:r>
+            <a:r>
+              <a:rPr lang="zh-CN" altLang="en-US" dirty="0"/>
+              <a:t>停止</a:t>
+            </a:r>
+            <a:r>
+              <a:rPr lang="en-US" altLang="zh-CN" dirty="0"/>
+              <a:t>/</a:t>
+            </a:r>
+            <a:r>
+              <a:rPr lang="zh-CN" altLang="en-US" dirty="0"/>
+              <a:t>继续</a:t>
+            </a:r>
+            <a:r>
+              <a:rPr lang="en-US" altLang="zh-CN" dirty="0"/>
+              <a:t>/</a:t>
+            </a:r>
+            <a:r>
+              <a:rPr lang="zh-CN" altLang="en-US" dirty="0"/>
+              <a:t>做新的</a:t>
+            </a:r>
+            <a:r>
+              <a:rPr lang="en-US" altLang="zh-CN" dirty="0"/>
+              <a:t>…</a:t>
+            </a:r>
+          </a:p>
+          <a:p>
+            <a:pPr lvl="1"/>
+            <a:r>
+              <a:rPr lang="zh-CN" altLang="en-US" dirty="0"/>
+              <a:t>你希望你们团队会 </a:t>
+            </a:r>
+            <a:r>
+              <a:rPr lang="en-US" altLang="zh-CN" dirty="0"/>
+              <a:t>…</a:t>
+            </a:r>
+          </a:p>
+          <a:p>
+            <a:pPr lvl="1"/>
+            <a:r>
+              <a:rPr lang="zh-CN" altLang="en-US" dirty="0"/>
+              <a:t>你希望 </a:t>
+            </a:r>
+            <a:r>
+              <a:rPr lang="en-US" altLang="zh-CN" dirty="0"/>
+              <a:t>TA </a:t>
+            </a:r>
+            <a:r>
+              <a:rPr lang="zh-CN" altLang="en-US" dirty="0"/>
+              <a:t>会 </a:t>
+            </a:r>
+            <a:r>
+              <a:rPr lang="en-US" altLang="zh-CN" dirty="0"/>
+              <a:t>…</a:t>
+            </a:r>
+          </a:p>
+          <a:p>
+            <a:pPr lvl="1"/>
+            <a:r>
+              <a:rPr lang="zh-CN" altLang="en-US" dirty="0"/>
+              <a:t>你希望本课程的老师会 </a:t>
+            </a:r>
+            <a:r>
+              <a:rPr lang="en-US" altLang="zh-CN" dirty="0"/>
+              <a:t>…</a:t>
+            </a:r>
+          </a:p>
+          <a:p>
+            <a:pPr lvl="1"/>
+            <a:r>
+              <a:rPr lang="zh-CN" altLang="en-US" dirty="0"/>
+              <a:t>你希望学院的其他课程会</a:t>
+            </a:r>
+            <a:r>
+              <a:rPr lang="en-US" altLang="zh-CN" dirty="0"/>
+              <a:t>…</a:t>
+            </a:r>
+          </a:p>
+          <a:p>
+            <a:pPr lvl="1"/>
+            <a:endParaRPr lang="en-US" altLang="zh-CN" dirty="0"/>
+          </a:p>
+          <a:p>
+            <a:r>
+              <a:rPr lang="zh-CN" altLang="en-US" dirty="0"/>
+              <a:t>对于每一个想法，你都回应 “对，并且</a:t>
+            </a:r>
+            <a:r>
+              <a:rPr lang="en-US" altLang="zh-CN" dirty="0"/>
+              <a:t>…</a:t>
+            </a:r>
+            <a:r>
+              <a:rPr lang="zh-CN" altLang="en-US" dirty="0"/>
+              <a:t>”</a:t>
+            </a:r>
+            <a:endParaRPr lang="en-US" altLang="zh-CN" dirty="0"/>
+          </a:p>
+          <a:p>
+            <a:r>
+              <a:rPr lang="zh-CN" altLang="en-US" dirty="0"/>
+              <a:t>然后继续提供新的点子</a:t>
+            </a:r>
+            <a:endParaRPr lang="en-US" altLang="zh-CN" dirty="0"/>
+          </a:p>
+          <a:p>
+            <a:pPr lvl="1"/>
+            <a:endParaRPr lang="en-US" altLang="zh-CN" dirty="0"/>
+          </a:p>
+          <a:p>
+            <a:r>
+              <a:rPr lang="zh-CN" altLang="en-US" dirty="0"/>
+              <a:t>更新在你们团队的 </a:t>
+            </a:r>
+            <a:r>
+              <a:rPr lang="zh-CN" altLang="en-US" b="1" dirty="0"/>
+              <a:t>博客</a:t>
+            </a:r>
+            <a:r>
+              <a:rPr lang="en-US" altLang="zh-CN" b="1" dirty="0"/>
+              <a:t>4</a:t>
+            </a:r>
+            <a:r>
+              <a:rPr lang="en-US" altLang="zh-CN" dirty="0"/>
+              <a:t> </a:t>
+            </a:r>
+            <a:r>
+              <a:rPr lang="zh-CN" altLang="en-US" dirty="0"/>
+              <a:t>末尾，标上每个点子的序号</a:t>
+            </a:r>
+            <a:endParaRPr lang="en-US" altLang="zh-CN" dirty="0"/>
+          </a:p>
+          <a:p>
+            <a:r>
+              <a:rPr lang="zh-CN" altLang="en-US" dirty="0"/>
+              <a:t>按点子数量多少来排序</a:t>
+            </a:r>
+          </a:p>
+        </p:txBody>
+      </p:sp>
+    </p:spTree>
+    <p:extLst>
+      <p:ext uri="{BB962C8B-B14F-4D97-AF65-F5344CB8AC3E}">
+        <p14:creationId xmlns:p14="http://schemas.microsoft.com/office/powerpoint/2010/main" val="3402127031"/>
+      </p:ext>
+    </p:extLst>
+  </p:cSld>
+  <p:clrMapOvr>
+    <a:masterClrMapping/>
+  </p:clrMapOvr>
+</p:sld>
+</file>
+
+<file path=ppt/slides/slide51.xml><?xml version="1.0" encoding="utf-8"?>
 <p:sld xmlns:a="http://schemas.openxmlformats.org/drawingml/2006/main" xmlns:r="http://schemas.openxmlformats.org/officeDocument/2006/relationships" xmlns:p="http://schemas.openxmlformats.org/presentationml/2006/main">
   <p:cSld>
     <p:spTree>
@@ -29188,7 +28488,7 @@
 </p:sld>
 </file>
 
-<file path=ppt/slides/slide51.xml><?xml version="1.0" encoding="utf-8"?>
+<file path=ppt/slides/slide52.xml><?xml version="1.0" encoding="utf-8"?>
 <p:sld xmlns:a="http://schemas.openxmlformats.org/drawingml/2006/main" xmlns:r="http://schemas.openxmlformats.org/officeDocument/2006/relationships" xmlns:p="http://schemas.openxmlformats.org/presentationml/2006/main">
   <p:cSld>
     <p:spTree>
@@ -29579,418 +28879,6 @@
     <p:extLst>
       <p:ext uri="{BB962C8B-B14F-4D97-AF65-F5344CB8AC3E}">
         <p14:creationId xmlns:p14="http://schemas.microsoft.com/office/powerpoint/2010/main" val="1796555868"/>
-      </p:ext>
-    </p:extLst>
-  </p:cSld>
-  <p:clrMapOvr>
-    <a:masterClrMapping/>
-  </p:clrMapOvr>
-</p:sld>
-</file>
-
-<file path=ppt/slides/slide52.xml><?xml version="1.0" encoding="utf-8"?>
-<p:sld xmlns:a="http://schemas.openxmlformats.org/drawingml/2006/main" xmlns:r="http://schemas.openxmlformats.org/officeDocument/2006/relationships" xmlns:p="http://schemas.openxmlformats.org/presentationml/2006/main">
-  <p:cSld>
-    <p:spTree>
-      <p:nvGrpSpPr>
-        <p:cNvPr id="1" name=""/>
-        <p:cNvGrpSpPr/>
-        <p:nvPr/>
-      </p:nvGrpSpPr>
-      <p:grpSpPr>
-        <a:xfrm>
-          <a:off x="0" y="0"/>
-          <a:ext cx="0" cy="0"/>
-          <a:chOff x="0" y="0"/>
-          <a:chExt cx="0" cy="0"/>
-        </a:xfrm>
-      </p:grpSpPr>
-      <p:sp>
-        <p:nvSpPr>
-          <p:cNvPr id="2" name="Title 1">
-            <a:extLst>
-              <a:ext uri="{FF2B5EF4-FFF2-40B4-BE49-F238E27FC236}">
-                <a16:creationId xmlns:a16="http://schemas.microsoft.com/office/drawing/2014/main" id="{2A4F1CC6-9C8D-4829-B5B5-1F57458A0188}"/>
-              </a:ext>
-            </a:extLst>
-          </p:cNvPr>
-          <p:cNvSpPr>
-            <a:spLocks noGrp="1"/>
-          </p:cNvSpPr>
-          <p:nvPr>
-            <p:ph type="title"/>
-          </p:nvPr>
-        </p:nvSpPr>
-        <p:spPr/>
-        <p:txBody>
-          <a:bodyPr/>
-          <a:lstStyle/>
-          <a:p>
-            <a:r>
-              <a:rPr lang="zh-CN" altLang="en-US" dirty="0"/>
-              <a:t>会议的思维活动（</a:t>
-            </a:r>
-            <a:r>
-              <a:rPr lang="en-US" altLang="zh-CN" dirty="0"/>
-              <a:t>3</a:t>
-            </a:r>
-            <a:r>
-              <a:rPr lang="zh-CN" altLang="en-US" dirty="0"/>
-              <a:t>）乐观角度</a:t>
-            </a:r>
-            <a:endParaRPr lang="en-US" dirty="0"/>
-          </a:p>
-        </p:txBody>
-      </p:sp>
-      <p:sp>
-        <p:nvSpPr>
-          <p:cNvPr id="3" name="Content Placeholder 2">
-            <a:extLst>
-              <a:ext uri="{FF2B5EF4-FFF2-40B4-BE49-F238E27FC236}">
-                <a16:creationId xmlns:a16="http://schemas.microsoft.com/office/drawing/2014/main" id="{417E3E16-EC1F-473E-9D03-B236FE71E927}"/>
-              </a:ext>
-            </a:extLst>
-          </p:cNvPr>
-          <p:cNvSpPr>
-            <a:spLocks noGrp="1"/>
-          </p:cNvSpPr>
-          <p:nvPr>
-            <p:ph idx="1"/>
-          </p:nvPr>
-        </p:nvSpPr>
-        <p:spPr>
-          <a:xfrm>
-            <a:off x="1120000" y="1825625"/>
-            <a:ext cx="5475353" cy="3330035"/>
-          </a:xfrm>
-        </p:spPr>
-        <p:txBody>
-          <a:bodyPr>
-            <a:normAutofit fontScale="77500" lnSpcReduction="20000"/>
-          </a:bodyPr>
-          <a:lstStyle/>
-          <a:p>
-            <a:r>
-              <a:rPr lang="zh-CN" altLang="en-US" dirty="0"/>
-              <a:t>从乐观的角度分析问题</a:t>
-            </a:r>
-            <a:endParaRPr lang="en-US" altLang="zh-CN" dirty="0"/>
-          </a:p>
-          <a:p>
-            <a:r>
-              <a:rPr lang="zh-CN" altLang="en-US" dirty="0"/>
-              <a:t>“对，并且</a:t>
-            </a:r>
-            <a:r>
-              <a:rPr lang="en-US" altLang="zh-CN" dirty="0"/>
-              <a:t>…</a:t>
-            </a:r>
-            <a:r>
-              <a:rPr lang="zh-CN" altLang="en-US" dirty="0"/>
-              <a:t>”</a:t>
-            </a:r>
-            <a:endParaRPr lang="en-US" altLang="zh-CN" dirty="0"/>
-          </a:p>
-          <a:p>
-            <a:r>
-              <a:rPr lang="zh-CN" altLang="en-US" dirty="0"/>
-              <a:t>“对，而且</a:t>
-            </a:r>
-            <a:r>
-              <a:rPr lang="en-US" altLang="zh-CN" dirty="0"/>
-              <a:t>…</a:t>
-            </a:r>
-            <a:r>
-              <a:rPr lang="zh-CN" altLang="en-US" dirty="0"/>
-              <a:t>”</a:t>
-            </a:r>
-            <a:endParaRPr lang="en-US" altLang="zh-CN" dirty="0"/>
-          </a:p>
-          <a:p>
-            <a:r>
-              <a:rPr lang="zh-CN" altLang="en-US" dirty="0"/>
-              <a:t>“对，另外</a:t>
-            </a:r>
-            <a:r>
-              <a:rPr lang="en-US" altLang="zh-CN" dirty="0"/>
-              <a:t>…</a:t>
-            </a:r>
-            <a:r>
-              <a:rPr lang="zh-CN" altLang="en-US" dirty="0"/>
-              <a:t>”</a:t>
-            </a:r>
-            <a:endParaRPr lang="en-US" altLang="zh-CN" dirty="0"/>
-          </a:p>
-          <a:p>
-            <a:r>
-              <a:rPr lang="zh-CN" altLang="en-US" dirty="0"/>
-              <a:t>“对，还有</a:t>
-            </a:r>
-            <a:r>
-              <a:rPr lang="en-US" altLang="zh-CN" dirty="0"/>
-              <a:t>…”</a:t>
-            </a:r>
-          </a:p>
-          <a:p>
-            <a:endParaRPr lang="en-US" altLang="zh-CN" dirty="0"/>
-          </a:p>
-          <a:p>
-            <a:r>
-              <a:rPr lang="zh-CN" altLang="en-US" dirty="0"/>
-              <a:t>我们可以做什么不一样的事情？</a:t>
-            </a:r>
-            <a:endParaRPr lang="en-US" altLang="zh-CN" dirty="0"/>
-          </a:p>
-          <a:p>
-            <a:r>
-              <a:rPr lang="zh-CN" altLang="en-US" dirty="0"/>
-              <a:t>有什么不寻常的事情可以发生？</a:t>
-            </a:r>
-            <a:endParaRPr lang="en-US" altLang="zh-CN" dirty="0"/>
-          </a:p>
-          <a:p>
-            <a:r>
-              <a:rPr lang="zh-CN" altLang="en-US" dirty="0"/>
-              <a:t>怎样才能更有趣？</a:t>
-            </a:r>
-            <a:endParaRPr lang="en-US" altLang="zh-CN" dirty="0"/>
-          </a:p>
-          <a:p>
-            <a:endParaRPr lang="en-US" dirty="0"/>
-          </a:p>
-        </p:txBody>
-      </p:sp>
-      <p:sp>
-        <p:nvSpPr>
-          <p:cNvPr id="4" name="TextBox 3">
-            <a:extLst>
-              <a:ext uri="{FF2B5EF4-FFF2-40B4-BE49-F238E27FC236}">
-                <a16:creationId xmlns:a16="http://schemas.microsoft.com/office/drawing/2014/main" id="{38189547-FB59-4E3B-BC7D-BF8166DA650E}"/>
-              </a:ext>
-            </a:extLst>
-          </p:cNvPr>
-          <p:cNvSpPr txBox="1"/>
-          <p:nvPr/>
-        </p:nvSpPr>
-        <p:spPr>
-          <a:xfrm>
-            <a:off x="6595353" y="1825625"/>
-            <a:ext cx="4476647" cy="646331"/>
-          </a:xfrm>
-          <a:prstGeom prst="rect">
-            <a:avLst/>
-          </a:prstGeom>
-          <a:noFill/>
-        </p:spPr>
-        <p:txBody>
-          <a:bodyPr wrap="square" rtlCol="0">
-            <a:spAutoFit/>
-          </a:bodyPr>
-          <a:lstStyle/>
-          <a:p>
-            <a:pPr marL="0" marR="0" lvl="0" indent="0" algn="l" defTabSz="457200" rtl="0" eaLnBrk="1" fontAlgn="auto" latinLnBrk="0" hangingPunct="1">
-              <a:lnSpc>
-                <a:spcPct val="100000"/>
-              </a:lnSpc>
-              <a:spcBef>
-                <a:spcPts val="0"/>
-              </a:spcBef>
-              <a:spcAft>
-                <a:spcPts val="0"/>
-              </a:spcAft>
-              <a:buClrTx/>
-              <a:buSzTx/>
-              <a:buFontTx/>
-              <a:buNone/>
-              <a:tabLst/>
-              <a:defRPr/>
-            </a:pPr>
-            <a:r>
-              <a:rPr kumimoji="0" lang="zh-CN" altLang="en-US" sz="1800" b="0" i="0" u="none" strike="noStrike" kern="1200" cap="none" spc="0" normalizeH="0" baseline="0" noProof="0" dirty="0">
-                <a:ln>
-                  <a:noFill/>
-                </a:ln>
-                <a:solidFill>
-                  <a:prstClr val="white"/>
-                </a:solidFill>
-                <a:effectLst/>
-                <a:uLnTx/>
-                <a:uFillTx/>
-                <a:latin typeface="Calibri"/>
-                <a:ea typeface="Microsoft YaHei"/>
-                <a:cs typeface="+mn-cs"/>
-              </a:rPr>
-              <a:t>我应该怎么样才能从这个活动中收获更大</a:t>
-            </a:r>
-            <a:r>
-              <a:rPr kumimoji="0" lang="en-US" altLang="zh-CN" sz="1800" b="0" i="0" u="none" strike="noStrike" kern="1200" cap="none" spc="0" normalizeH="0" baseline="0" noProof="0" dirty="0">
-                <a:ln>
-                  <a:noFill/>
-                </a:ln>
-                <a:solidFill>
-                  <a:prstClr val="white"/>
-                </a:solidFill>
-                <a:effectLst/>
-                <a:uLnTx/>
-                <a:uFillTx/>
-                <a:latin typeface="Calibri"/>
-                <a:ea typeface="Microsoft YaHei"/>
-                <a:cs typeface="+mn-cs"/>
-              </a:rPr>
-              <a:t>?</a:t>
-            </a:r>
-          </a:p>
-          <a:p>
-            <a:pPr marL="0" marR="0" lvl="0" indent="0" algn="l" defTabSz="457200" rtl="0" eaLnBrk="1" fontAlgn="auto" latinLnBrk="0" hangingPunct="1">
-              <a:lnSpc>
-                <a:spcPct val="100000"/>
-              </a:lnSpc>
-              <a:spcBef>
-                <a:spcPts val="0"/>
-              </a:spcBef>
-              <a:spcAft>
-                <a:spcPts val="0"/>
-              </a:spcAft>
-              <a:buClrTx/>
-              <a:buSzTx/>
-              <a:buFontTx/>
-              <a:buNone/>
-              <a:tabLst/>
-              <a:defRPr/>
-            </a:pPr>
-            <a:r>
-              <a:rPr kumimoji="0" lang="zh-CN" altLang="en-US" sz="1800" b="0" i="0" u="none" strike="noStrike" kern="1200" cap="none" spc="0" normalizeH="0" baseline="0" noProof="0" dirty="0">
-                <a:ln>
-                  <a:noFill/>
-                </a:ln>
-                <a:solidFill>
-                  <a:prstClr val="white"/>
-                </a:solidFill>
-                <a:effectLst/>
-                <a:uLnTx/>
-                <a:uFillTx/>
-                <a:latin typeface="Calibri"/>
-                <a:ea typeface="Microsoft YaHei"/>
-                <a:cs typeface="+mn-cs"/>
-              </a:rPr>
-              <a:t>既然这样， 为何不再进一步</a:t>
-            </a:r>
-            <a:r>
-              <a:rPr kumimoji="0" lang="en-US" altLang="zh-CN" sz="1800" b="0" i="0" u="none" strike="noStrike" kern="1200" cap="none" spc="0" normalizeH="0" baseline="0" noProof="0" dirty="0">
-                <a:ln>
-                  <a:noFill/>
-                </a:ln>
-                <a:solidFill>
-                  <a:prstClr val="white"/>
-                </a:solidFill>
-                <a:effectLst/>
-                <a:uLnTx/>
-                <a:uFillTx/>
-                <a:latin typeface="Calibri"/>
-                <a:ea typeface="Microsoft YaHei"/>
-                <a:cs typeface="+mn-cs"/>
-              </a:rPr>
-              <a:t>…? </a:t>
-            </a:r>
-            <a:endParaRPr kumimoji="0" lang="en-US" sz="1800" b="0" i="0" u="none" strike="noStrike" kern="1200" cap="none" spc="0" normalizeH="0" baseline="0" noProof="0" dirty="0">
-              <a:ln>
-                <a:noFill/>
-              </a:ln>
-              <a:solidFill>
-                <a:prstClr val="white"/>
-              </a:solidFill>
-              <a:effectLst/>
-              <a:uLnTx/>
-              <a:uFillTx/>
-              <a:latin typeface="Calibri"/>
-              <a:ea typeface="Microsoft YaHei"/>
-              <a:cs typeface="+mn-cs"/>
-            </a:endParaRPr>
-          </a:p>
-        </p:txBody>
-      </p:sp>
-      <p:sp>
-        <p:nvSpPr>
-          <p:cNvPr id="5" name="Rectangle 4">
-            <a:extLst>
-              <a:ext uri="{FF2B5EF4-FFF2-40B4-BE49-F238E27FC236}">
-                <a16:creationId xmlns:a16="http://schemas.microsoft.com/office/drawing/2014/main" id="{5898A5FC-C6FF-40F1-B769-0DECF4B361A4}"/>
-              </a:ext>
-            </a:extLst>
-          </p:cNvPr>
-          <p:cNvSpPr/>
-          <p:nvPr/>
-        </p:nvSpPr>
-        <p:spPr>
-          <a:xfrm>
-            <a:off x="838200" y="6123543"/>
-            <a:ext cx="5493812" cy="369332"/>
-          </a:xfrm>
-          <a:prstGeom prst="rect">
-            <a:avLst/>
-          </a:prstGeom>
-        </p:spPr>
-        <p:txBody>
-          <a:bodyPr wrap="none">
-            <a:spAutoFit/>
-          </a:bodyPr>
-          <a:lstStyle/>
-          <a:p>
-            <a:pPr marL="0" marR="0" lvl="0" indent="0" algn="l" defTabSz="457200" rtl="0" eaLnBrk="1" fontAlgn="auto" latinLnBrk="0" hangingPunct="1">
-              <a:lnSpc>
-                <a:spcPct val="100000"/>
-              </a:lnSpc>
-              <a:spcBef>
-                <a:spcPts val="0"/>
-              </a:spcBef>
-              <a:spcAft>
-                <a:spcPts val="0"/>
-              </a:spcAft>
-              <a:buClrTx/>
-              <a:buSzTx/>
-              <a:buFontTx/>
-              <a:buNone/>
-              <a:tabLst/>
-              <a:defRPr/>
-            </a:pPr>
-            <a:r>
-              <a:rPr kumimoji="0" lang="zh-CN" altLang="en-US" sz="1800" b="1" i="0" u="none" strike="noStrike" kern="1200" cap="none" spc="0" normalizeH="0" baseline="0" noProof="0" dirty="0">
-                <a:ln>
-                  <a:noFill/>
-                </a:ln>
-                <a:solidFill>
-                  <a:srgbClr val="FFC000"/>
-                </a:solidFill>
-                <a:effectLst/>
-                <a:uLnTx/>
-                <a:uFillTx/>
-                <a:latin typeface="Calibri"/>
-                <a:ea typeface="Microsoft YaHei"/>
-                <a:cs typeface="+mn-cs"/>
-              </a:rPr>
-              <a:t>小组：写下一些“对，并且”的想法，提供一些创意</a:t>
-            </a:r>
-            <a:endParaRPr kumimoji="0" lang="en-US" sz="1800" b="1" i="0" u="none" strike="noStrike" kern="1200" cap="none" spc="0" normalizeH="0" baseline="0" noProof="0" dirty="0">
-              <a:ln>
-                <a:noFill/>
-              </a:ln>
-              <a:solidFill>
-                <a:srgbClr val="FFC000"/>
-              </a:solidFill>
-              <a:effectLst/>
-              <a:uLnTx/>
-              <a:uFillTx/>
-              <a:latin typeface="Calibri"/>
-              <a:ea typeface="Microsoft YaHei"/>
-              <a:cs typeface="+mn-cs"/>
-            </a:endParaRPr>
-          </a:p>
-        </p:txBody>
-      </p:sp>
-    </p:spTree>
-    <p:extLst>
-      <p:ext uri="{BB962C8B-B14F-4D97-AF65-F5344CB8AC3E}">
-        <p14:creationId xmlns:p14="http://schemas.microsoft.com/office/powerpoint/2010/main" val="184108523"/>
       </p:ext>
     </p:extLst>
   </p:cSld>
@@ -30022,6 +28910,418 @@
           <p:cNvPr id="2" name="Title 1">
             <a:extLst>
               <a:ext uri="{FF2B5EF4-FFF2-40B4-BE49-F238E27FC236}">
+                <a16:creationId xmlns:a16="http://schemas.microsoft.com/office/drawing/2014/main" id="{2A4F1CC6-9C8D-4829-B5B5-1F57458A0188}"/>
+              </a:ext>
+            </a:extLst>
+          </p:cNvPr>
+          <p:cNvSpPr>
+            <a:spLocks noGrp="1"/>
+          </p:cNvSpPr>
+          <p:nvPr>
+            <p:ph type="title"/>
+          </p:nvPr>
+        </p:nvSpPr>
+        <p:spPr/>
+        <p:txBody>
+          <a:bodyPr/>
+          <a:lstStyle/>
+          <a:p>
+            <a:r>
+              <a:rPr lang="zh-CN" altLang="en-US" dirty="0"/>
+              <a:t>会议的思维活动（</a:t>
+            </a:r>
+            <a:r>
+              <a:rPr lang="en-US" altLang="zh-CN" dirty="0"/>
+              <a:t>3</a:t>
+            </a:r>
+            <a:r>
+              <a:rPr lang="zh-CN" altLang="en-US" dirty="0"/>
+              <a:t>）乐观角度</a:t>
+            </a:r>
+            <a:endParaRPr lang="en-US" dirty="0"/>
+          </a:p>
+        </p:txBody>
+      </p:sp>
+      <p:sp>
+        <p:nvSpPr>
+          <p:cNvPr id="3" name="Content Placeholder 2">
+            <a:extLst>
+              <a:ext uri="{FF2B5EF4-FFF2-40B4-BE49-F238E27FC236}">
+                <a16:creationId xmlns:a16="http://schemas.microsoft.com/office/drawing/2014/main" id="{417E3E16-EC1F-473E-9D03-B236FE71E927}"/>
+              </a:ext>
+            </a:extLst>
+          </p:cNvPr>
+          <p:cNvSpPr>
+            <a:spLocks noGrp="1"/>
+          </p:cNvSpPr>
+          <p:nvPr>
+            <p:ph idx="1"/>
+          </p:nvPr>
+        </p:nvSpPr>
+        <p:spPr>
+          <a:xfrm>
+            <a:off x="1120000" y="1825625"/>
+            <a:ext cx="5475353" cy="3330035"/>
+          </a:xfrm>
+        </p:spPr>
+        <p:txBody>
+          <a:bodyPr>
+            <a:normAutofit fontScale="77500" lnSpcReduction="20000"/>
+          </a:bodyPr>
+          <a:lstStyle/>
+          <a:p>
+            <a:r>
+              <a:rPr lang="zh-CN" altLang="en-US" dirty="0"/>
+              <a:t>从乐观的角度分析问题</a:t>
+            </a:r>
+            <a:endParaRPr lang="en-US" altLang="zh-CN" dirty="0"/>
+          </a:p>
+          <a:p>
+            <a:r>
+              <a:rPr lang="zh-CN" altLang="en-US" dirty="0"/>
+              <a:t>“对，并且</a:t>
+            </a:r>
+            <a:r>
+              <a:rPr lang="en-US" altLang="zh-CN" dirty="0"/>
+              <a:t>…</a:t>
+            </a:r>
+            <a:r>
+              <a:rPr lang="zh-CN" altLang="en-US" dirty="0"/>
+              <a:t>”</a:t>
+            </a:r>
+            <a:endParaRPr lang="en-US" altLang="zh-CN" dirty="0"/>
+          </a:p>
+          <a:p>
+            <a:r>
+              <a:rPr lang="zh-CN" altLang="en-US" dirty="0"/>
+              <a:t>“对，而且</a:t>
+            </a:r>
+            <a:r>
+              <a:rPr lang="en-US" altLang="zh-CN" dirty="0"/>
+              <a:t>…</a:t>
+            </a:r>
+            <a:r>
+              <a:rPr lang="zh-CN" altLang="en-US" dirty="0"/>
+              <a:t>”</a:t>
+            </a:r>
+            <a:endParaRPr lang="en-US" altLang="zh-CN" dirty="0"/>
+          </a:p>
+          <a:p>
+            <a:r>
+              <a:rPr lang="zh-CN" altLang="en-US" dirty="0"/>
+              <a:t>“对，另外</a:t>
+            </a:r>
+            <a:r>
+              <a:rPr lang="en-US" altLang="zh-CN" dirty="0"/>
+              <a:t>…</a:t>
+            </a:r>
+            <a:r>
+              <a:rPr lang="zh-CN" altLang="en-US" dirty="0"/>
+              <a:t>”</a:t>
+            </a:r>
+            <a:endParaRPr lang="en-US" altLang="zh-CN" dirty="0"/>
+          </a:p>
+          <a:p>
+            <a:r>
+              <a:rPr lang="zh-CN" altLang="en-US" dirty="0"/>
+              <a:t>“对，还有</a:t>
+            </a:r>
+            <a:r>
+              <a:rPr lang="en-US" altLang="zh-CN" dirty="0"/>
+              <a:t>…”</a:t>
+            </a:r>
+          </a:p>
+          <a:p>
+            <a:endParaRPr lang="en-US" altLang="zh-CN" dirty="0"/>
+          </a:p>
+          <a:p>
+            <a:r>
+              <a:rPr lang="zh-CN" altLang="en-US" dirty="0"/>
+              <a:t>我们可以做什么不一样的事情？</a:t>
+            </a:r>
+            <a:endParaRPr lang="en-US" altLang="zh-CN" dirty="0"/>
+          </a:p>
+          <a:p>
+            <a:r>
+              <a:rPr lang="zh-CN" altLang="en-US" dirty="0"/>
+              <a:t>有什么不寻常的事情可以发生？</a:t>
+            </a:r>
+            <a:endParaRPr lang="en-US" altLang="zh-CN" dirty="0"/>
+          </a:p>
+          <a:p>
+            <a:r>
+              <a:rPr lang="zh-CN" altLang="en-US" dirty="0"/>
+              <a:t>怎样才能更有趣？</a:t>
+            </a:r>
+            <a:endParaRPr lang="en-US" altLang="zh-CN" dirty="0"/>
+          </a:p>
+          <a:p>
+            <a:endParaRPr lang="en-US" dirty="0"/>
+          </a:p>
+        </p:txBody>
+      </p:sp>
+      <p:sp>
+        <p:nvSpPr>
+          <p:cNvPr id="4" name="TextBox 3">
+            <a:extLst>
+              <a:ext uri="{FF2B5EF4-FFF2-40B4-BE49-F238E27FC236}">
+                <a16:creationId xmlns:a16="http://schemas.microsoft.com/office/drawing/2014/main" id="{38189547-FB59-4E3B-BC7D-BF8166DA650E}"/>
+              </a:ext>
+            </a:extLst>
+          </p:cNvPr>
+          <p:cNvSpPr txBox="1"/>
+          <p:nvPr/>
+        </p:nvSpPr>
+        <p:spPr>
+          <a:xfrm>
+            <a:off x="6595353" y="1825625"/>
+            <a:ext cx="4476647" cy="646331"/>
+          </a:xfrm>
+          <a:prstGeom prst="rect">
+            <a:avLst/>
+          </a:prstGeom>
+          <a:noFill/>
+        </p:spPr>
+        <p:txBody>
+          <a:bodyPr wrap="square" rtlCol="0">
+            <a:spAutoFit/>
+          </a:bodyPr>
+          <a:lstStyle/>
+          <a:p>
+            <a:pPr marL="0" marR="0" lvl="0" indent="0" algn="l" defTabSz="457200" rtl="0" eaLnBrk="1" fontAlgn="auto" latinLnBrk="0" hangingPunct="1">
+              <a:lnSpc>
+                <a:spcPct val="100000"/>
+              </a:lnSpc>
+              <a:spcBef>
+                <a:spcPts val="0"/>
+              </a:spcBef>
+              <a:spcAft>
+                <a:spcPts val="0"/>
+              </a:spcAft>
+              <a:buClrTx/>
+              <a:buSzTx/>
+              <a:buFontTx/>
+              <a:buNone/>
+              <a:tabLst/>
+              <a:defRPr/>
+            </a:pPr>
+            <a:r>
+              <a:rPr kumimoji="0" lang="zh-CN" altLang="en-US" sz="1800" b="0" i="0" u="none" strike="noStrike" kern="1200" cap="none" spc="0" normalizeH="0" baseline="0" noProof="0" dirty="0">
+                <a:ln>
+                  <a:noFill/>
+                </a:ln>
+                <a:solidFill>
+                  <a:prstClr val="white"/>
+                </a:solidFill>
+                <a:effectLst/>
+                <a:uLnTx/>
+                <a:uFillTx/>
+                <a:latin typeface="Calibri"/>
+                <a:ea typeface="Microsoft YaHei"/>
+                <a:cs typeface="+mn-cs"/>
+              </a:rPr>
+              <a:t>我应该怎么样才能从这个活动中收获更大</a:t>
+            </a:r>
+            <a:r>
+              <a:rPr kumimoji="0" lang="en-US" altLang="zh-CN" sz="1800" b="0" i="0" u="none" strike="noStrike" kern="1200" cap="none" spc="0" normalizeH="0" baseline="0" noProof="0" dirty="0">
+                <a:ln>
+                  <a:noFill/>
+                </a:ln>
+                <a:solidFill>
+                  <a:prstClr val="white"/>
+                </a:solidFill>
+                <a:effectLst/>
+                <a:uLnTx/>
+                <a:uFillTx/>
+                <a:latin typeface="Calibri"/>
+                <a:ea typeface="Microsoft YaHei"/>
+                <a:cs typeface="+mn-cs"/>
+              </a:rPr>
+              <a:t>?</a:t>
+            </a:r>
+          </a:p>
+          <a:p>
+            <a:pPr marL="0" marR="0" lvl="0" indent="0" algn="l" defTabSz="457200" rtl="0" eaLnBrk="1" fontAlgn="auto" latinLnBrk="0" hangingPunct="1">
+              <a:lnSpc>
+                <a:spcPct val="100000"/>
+              </a:lnSpc>
+              <a:spcBef>
+                <a:spcPts val="0"/>
+              </a:spcBef>
+              <a:spcAft>
+                <a:spcPts val="0"/>
+              </a:spcAft>
+              <a:buClrTx/>
+              <a:buSzTx/>
+              <a:buFontTx/>
+              <a:buNone/>
+              <a:tabLst/>
+              <a:defRPr/>
+            </a:pPr>
+            <a:r>
+              <a:rPr kumimoji="0" lang="zh-CN" altLang="en-US" sz="1800" b="0" i="0" u="none" strike="noStrike" kern="1200" cap="none" spc="0" normalizeH="0" baseline="0" noProof="0" dirty="0">
+                <a:ln>
+                  <a:noFill/>
+                </a:ln>
+                <a:solidFill>
+                  <a:prstClr val="white"/>
+                </a:solidFill>
+                <a:effectLst/>
+                <a:uLnTx/>
+                <a:uFillTx/>
+                <a:latin typeface="Calibri"/>
+                <a:ea typeface="Microsoft YaHei"/>
+                <a:cs typeface="+mn-cs"/>
+              </a:rPr>
+              <a:t>既然这样， 为何不再进一步</a:t>
+            </a:r>
+            <a:r>
+              <a:rPr kumimoji="0" lang="en-US" altLang="zh-CN" sz="1800" b="0" i="0" u="none" strike="noStrike" kern="1200" cap="none" spc="0" normalizeH="0" baseline="0" noProof="0" dirty="0">
+                <a:ln>
+                  <a:noFill/>
+                </a:ln>
+                <a:solidFill>
+                  <a:prstClr val="white"/>
+                </a:solidFill>
+                <a:effectLst/>
+                <a:uLnTx/>
+                <a:uFillTx/>
+                <a:latin typeface="Calibri"/>
+                <a:ea typeface="Microsoft YaHei"/>
+                <a:cs typeface="+mn-cs"/>
+              </a:rPr>
+              <a:t>…? </a:t>
+            </a:r>
+            <a:endParaRPr kumimoji="0" lang="en-US" sz="1800" b="0" i="0" u="none" strike="noStrike" kern="1200" cap="none" spc="0" normalizeH="0" baseline="0" noProof="0" dirty="0">
+              <a:ln>
+                <a:noFill/>
+              </a:ln>
+              <a:solidFill>
+                <a:prstClr val="white"/>
+              </a:solidFill>
+              <a:effectLst/>
+              <a:uLnTx/>
+              <a:uFillTx/>
+              <a:latin typeface="Calibri"/>
+              <a:ea typeface="Microsoft YaHei"/>
+              <a:cs typeface="+mn-cs"/>
+            </a:endParaRPr>
+          </a:p>
+        </p:txBody>
+      </p:sp>
+      <p:sp>
+        <p:nvSpPr>
+          <p:cNvPr id="5" name="Rectangle 4">
+            <a:extLst>
+              <a:ext uri="{FF2B5EF4-FFF2-40B4-BE49-F238E27FC236}">
+                <a16:creationId xmlns:a16="http://schemas.microsoft.com/office/drawing/2014/main" id="{5898A5FC-C6FF-40F1-B769-0DECF4B361A4}"/>
+              </a:ext>
+            </a:extLst>
+          </p:cNvPr>
+          <p:cNvSpPr/>
+          <p:nvPr/>
+        </p:nvSpPr>
+        <p:spPr>
+          <a:xfrm>
+            <a:off x="838200" y="6123543"/>
+            <a:ext cx="5493812" cy="369332"/>
+          </a:xfrm>
+          <a:prstGeom prst="rect">
+            <a:avLst/>
+          </a:prstGeom>
+        </p:spPr>
+        <p:txBody>
+          <a:bodyPr wrap="none">
+            <a:spAutoFit/>
+          </a:bodyPr>
+          <a:lstStyle/>
+          <a:p>
+            <a:pPr marL="0" marR="0" lvl="0" indent="0" algn="l" defTabSz="457200" rtl="0" eaLnBrk="1" fontAlgn="auto" latinLnBrk="0" hangingPunct="1">
+              <a:lnSpc>
+                <a:spcPct val="100000"/>
+              </a:lnSpc>
+              <a:spcBef>
+                <a:spcPts val="0"/>
+              </a:spcBef>
+              <a:spcAft>
+                <a:spcPts val="0"/>
+              </a:spcAft>
+              <a:buClrTx/>
+              <a:buSzTx/>
+              <a:buFontTx/>
+              <a:buNone/>
+              <a:tabLst/>
+              <a:defRPr/>
+            </a:pPr>
+            <a:r>
+              <a:rPr kumimoji="0" lang="zh-CN" altLang="en-US" sz="1800" b="1" i="0" u="none" strike="noStrike" kern="1200" cap="none" spc="0" normalizeH="0" baseline="0" noProof="0" dirty="0">
+                <a:ln>
+                  <a:noFill/>
+                </a:ln>
+                <a:solidFill>
+                  <a:srgbClr val="FFC000"/>
+                </a:solidFill>
+                <a:effectLst/>
+                <a:uLnTx/>
+                <a:uFillTx/>
+                <a:latin typeface="Calibri"/>
+                <a:ea typeface="Microsoft YaHei"/>
+                <a:cs typeface="+mn-cs"/>
+              </a:rPr>
+              <a:t>小组：写下一些“对，并且”的想法，提供一些创意</a:t>
+            </a:r>
+            <a:endParaRPr kumimoji="0" lang="en-US" sz="1800" b="1" i="0" u="none" strike="noStrike" kern="1200" cap="none" spc="0" normalizeH="0" baseline="0" noProof="0" dirty="0">
+              <a:ln>
+                <a:noFill/>
+              </a:ln>
+              <a:solidFill>
+                <a:srgbClr val="FFC000"/>
+              </a:solidFill>
+              <a:effectLst/>
+              <a:uLnTx/>
+              <a:uFillTx/>
+              <a:latin typeface="Calibri"/>
+              <a:ea typeface="Microsoft YaHei"/>
+              <a:cs typeface="+mn-cs"/>
+            </a:endParaRPr>
+          </a:p>
+        </p:txBody>
+      </p:sp>
+    </p:spTree>
+    <p:extLst>
+      <p:ext uri="{BB962C8B-B14F-4D97-AF65-F5344CB8AC3E}">
+        <p14:creationId xmlns:p14="http://schemas.microsoft.com/office/powerpoint/2010/main" val="184108523"/>
+      </p:ext>
+    </p:extLst>
+  </p:cSld>
+  <p:clrMapOvr>
+    <a:masterClrMapping/>
+  </p:clrMapOvr>
+</p:sld>
+</file>
+
+<file path=ppt/slides/slide54.xml><?xml version="1.0" encoding="utf-8"?>
+<p:sld xmlns:a="http://schemas.openxmlformats.org/drawingml/2006/main" xmlns:r="http://schemas.openxmlformats.org/officeDocument/2006/relationships" xmlns:p="http://schemas.openxmlformats.org/presentationml/2006/main">
+  <p:cSld>
+    <p:spTree>
+      <p:nvGrpSpPr>
+        <p:cNvPr id="1" name=""/>
+        <p:cNvGrpSpPr/>
+        <p:nvPr/>
+      </p:nvGrpSpPr>
+      <p:grpSpPr>
+        <a:xfrm>
+          <a:off x="0" y="0"/>
+          <a:ext cx="0" cy="0"/>
+          <a:chOff x="0" y="0"/>
+          <a:chExt cx="0" cy="0"/>
+        </a:xfrm>
+      </p:grpSpPr>
+      <p:sp>
+        <p:nvSpPr>
+          <p:cNvPr id="2" name="Title 1">
+            <a:extLst>
+              <a:ext uri="{FF2B5EF4-FFF2-40B4-BE49-F238E27FC236}">
                 <a16:creationId xmlns:a16="http://schemas.microsoft.com/office/drawing/2014/main" id="{DBC0037C-772E-407B-9C2D-7FF88F7F6B5B}"/>
               </a:ext>
             </a:extLst>
@@ -30077,34 +29377,54 @@
           <a:p>
             <a:r>
               <a:rPr lang="zh-CN" altLang="en-US" dirty="0"/>
-              <a:t>头脑风暴的基本要素</a:t>
-            </a:r>
-            <a:endParaRPr lang="en-US" altLang="zh-CN" dirty="0"/>
-          </a:p>
-          <a:p>
-            <a:r>
-              <a:rPr lang="zh-CN" altLang="en-US" dirty="0"/>
-              <a:t>让思路发展</a:t>
-            </a:r>
-            <a:endParaRPr lang="en-US" altLang="zh-CN" dirty="0"/>
-          </a:p>
-          <a:p>
+              <a:t>很多工作和生活中的矛盾，来自于交流的</a:t>
+            </a:r>
             <a:r>
               <a:rPr lang="zh-CN" altLang="en-US" dirty="0">
-                <a:hlinkClick r:id="rId2"/>
+                <a:solidFill>
+                  <a:srgbClr val="FF0000"/>
+                </a:solidFill>
               </a:rPr>
-              <a:t>例子</a:t>
-            </a:r>
+              <a:t>不通畅</a:t>
+            </a:r>
+            <a:endParaRPr lang="en-US" altLang="zh-CN" dirty="0">
+              <a:solidFill>
+                <a:srgbClr val="FF0000"/>
+              </a:solidFill>
+            </a:endParaRPr>
+          </a:p>
+          <a:p>
+            <a:pPr lvl="1"/>
             <a:r>
               <a:rPr lang="en-US" altLang="zh-CN" dirty="0">
                 <a:hlinkClick r:id="rId2"/>
               </a:rPr>
-              <a:t>1</a:t>
-            </a:r>
+              <a:t>It's Not About The Nail - YouTube</a:t>
+            </a:r>
+            <a:endParaRPr lang="zh-CN" altLang="en-US" dirty="0">
+              <a:solidFill>
+                <a:srgbClr val="FF0000"/>
+              </a:solidFill>
+            </a:endParaRPr>
+          </a:p>
+          <a:p>
+            <a:endParaRPr lang="en-US" altLang="zh-CN" dirty="0"/>
+          </a:p>
+          <a:p>
             <a:r>
               <a:rPr lang="zh-CN" altLang="en-US" dirty="0"/>
-              <a:t>， </a:t>
-            </a:r>
+              <a:t>头脑风暴的基本要素</a:t>
+            </a:r>
+            <a:endParaRPr lang="en-US" altLang="zh-CN" dirty="0"/>
+          </a:p>
+          <a:p>
+            <a:r>
+              <a:rPr lang="zh-CN" altLang="en-US" dirty="0"/>
+              <a:t>让思路发展</a:t>
+            </a:r>
+            <a:endParaRPr lang="en-US" altLang="zh-CN" dirty="0"/>
+          </a:p>
+          <a:p>
             <a:r>
               <a:rPr lang="zh-CN" altLang="en-US" dirty="0">
                 <a:hlinkClick r:id="rId3"/>
@@ -30114,6 +29434,22 @@
             <a:r>
               <a:rPr lang="en-US" altLang="zh-CN" dirty="0">
                 <a:hlinkClick r:id="rId3"/>
+              </a:rPr>
+              <a:t>1</a:t>
+            </a:r>
+            <a:r>
+              <a:rPr lang="zh-CN" altLang="en-US" dirty="0"/>
+              <a:t>， </a:t>
+            </a:r>
+            <a:r>
+              <a:rPr lang="zh-CN" altLang="en-US" dirty="0">
+                <a:hlinkClick r:id="rId4"/>
+              </a:rPr>
+              <a:t>例子</a:t>
+            </a:r>
+            <a:r>
+              <a:rPr lang="en-US" altLang="zh-CN" dirty="0">
+                <a:hlinkClick r:id="rId4"/>
               </a:rPr>
               <a:t>2</a:t>
             </a:r>
@@ -30134,7 +29470,7 @@
 </p:sld>
 </file>
 
-<file path=ppt/slides/slide54.xml><?xml version="1.0" encoding="utf-8"?>
+<file path=ppt/slides/slide55.xml><?xml version="1.0" encoding="utf-8"?>
 <p:sld xmlns:a="http://schemas.openxmlformats.org/drawingml/2006/main" xmlns:r="http://schemas.openxmlformats.org/officeDocument/2006/relationships" xmlns:p="http://schemas.openxmlformats.org/presentationml/2006/main">
   <p:cSld>
     <p:spTree>
@@ -30656,7 +29992,7 @@
 </p:sld>
 </file>
 
-<file path=ppt/slides/slide55.xml><?xml version="1.0" encoding="utf-8"?>
+<file path=ppt/slides/slide56.xml><?xml version="1.0" encoding="utf-8"?>
 <p:sld xmlns:a="http://schemas.openxmlformats.org/drawingml/2006/main" xmlns:r="http://schemas.openxmlformats.org/officeDocument/2006/relationships" xmlns:p="http://schemas.openxmlformats.org/presentationml/2006/main">
   <p:cSld>
     <p:bg>
@@ -31053,281 +30389,6 @@
 </p:sld>
 </file>
 
-<file path=ppt/slides/slide56.xml><?xml version="1.0" encoding="utf-8"?>
-<p:sld xmlns:a="http://schemas.openxmlformats.org/drawingml/2006/main" xmlns:r="http://schemas.openxmlformats.org/officeDocument/2006/relationships" xmlns:p="http://schemas.openxmlformats.org/presentationml/2006/main">
-  <p:cSld>
-    <p:spTree>
-      <p:nvGrpSpPr>
-        <p:cNvPr id="1" name=""/>
-        <p:cNvGrpSpPr/>
-        <p:nvPr/>
-      </p:nvGrpSpPr>
-      <p:grpSpPr>
-        <a:xfrm>
-          <a:off x="0" y="0"/>
-          <a:ext cx="0" cy="0"/>
-          <a:chOff x="0" y="0"/>
-          <a:chExt cx="0" cy="0"/>
-        </a:xfrm>
-      </p:grpSpPr>
-      <p:sp>
-        <p:nvSpPr>
-          <p:cNvPr id="2" name="Title 1"/>
-          <p:cNvSpPr>
-            <a:spLocks noGrp="1"/>
-          </p:cNvSpPr>
-          <p:nvPr>
-            <p:ph type="title"/>
-          </p:nvPr>
-        </p:nvSpPr>
-        <p:spPr/>
-        <p:txBody>
-          <a:bodyPr/>
-          <a:lstStyle/>
-          <a:p>
-            <a:r>
-              <a:rPr lang="en-US" dirty="0"/>
-              <a:t>Exercise</a:t>
-            </a:r>
-          </a:p>
-        </p:txBody>
-      </p:sp>
-      <p:sp>
-        <p:nvSpPr>
-          <p:cNvPr id="3" name="Content Placeholder 2"/>
-          <p:cNvSpPr>
-            <a:spLocks noGrp="1"/>
-          </p:cNvSpPr>
-          <p:nvPr>
-            <p:ph idx="1"/>
-          </p:nvPr>
-        </p:nvSpPr>
-        <p:spPr>
-          <a:xfrm>
-            <a:off x="1120000" y="1825625"/>
-            <a:ext cx="5052200" cy="4351338"/>
-          </a:xfrm>
-        </p:spPr>
-        <p:txBody>
-          <a:bodyPr/>
-          <a:lstStyle/>
-          <a:p>
-            <a:r>
-              <a:rPr lang="en-US" dirty="0"/>
-              <a:t>PM  </a:t>
-            </a:r>
-            <a:r>
-              <a:rPr lang="zh-CN" altLang="en-US" dirty="0"/>
-              <a:t>在敏捷开发模式中负责和用户打交道， 为自己的团队争取最大的短期和长期利益。</a:t>
-            </a:r>
-            <a:endParaRPr lang="en-US" dirty="0"/>
-          </a:p>
-          <a:p>
-            <a:r>
-              <a:rPr lang="en-US" dirty="0"/>
-              <a:t> </a:t>
-            </a:r>
-            <a:r>
-              <a:rPr lang="zh-CN" altLang="en-US" dirty="0"/>
-              <a:t>在软件兼职项目中，有很多不同的任务和完成任务的条件，下面的任务都有什么样的风险</a:t>
-            </a:r>
-            <a:r>
-              <a:rPr lang="en-US" dirty="0"/>
-              <a:t>?  </a:t>
-            </a:r>
-            <a:r>
-              <a:rPr lang="zh-CN" altLang="en-US" dirty="0"/>
-              <a:t>你如何应对</a:t>
-            </a:r>
-            <a:r>
-              <a:rPr lang="en-US" dirty="0"/>
-              <a:t>?  </a:t>
-            </a:r>
-            <a:r>
-              <a:rPr lang="zh-CN" altLang="en-US" dirty="0"/>
-              <a:t>你作为团队的</a:t>
-            </a:r>
-            <a:r>
-              <a:rPr lang="en-US" dirty="0"/>
-              <a:t>PM  </a:t>
-            </a:r>
-            <a:r>
-              <a:rPr lang="zh-CN" altLang="en-US" dirty="0"/>
-              <a:t>你决定接手这个项目么</a:t>
-            </a:r>
-            <a:r>
-              <a:rPr lang="en-US" dirty="0"/>
-              <a:t>? </a:t>
-            </a:r>
-          </a:p>
-          <a:p>
-            <a:r>
-              <a:rPr lang="en-US" dirty="0"/>
-              <a:t>  </a:t>
-            </a:r>
-          </a:p>
-          <a:p>
-            <a:pPr marL="0" indent="0">
-              <a:buNone/>
-            </a:pPr>
-            <a:endParaRPr lang="en-US" dirty="0"/>
-          </a:p>
-        </p:txBody>
-      </p:sp>
-      <p:sp>
-        <p:nvSpPr>
-          <p:cNvPr id="4" name="TextBox 3">
-            <a:extLst>
-              <a:ext uri="{FF2B5EF4-FFF2-40B4-BE49-F238E27FC236}">
-                <a16:creationId xmlns:a16="http://schemas.microsoft.com/office/drawing/2014/main" id="{E1FBD344-3558-4F9A-8582-20F723F5FC26}"/>
-              </a:ext>
-            </a:extLst>
-          </p:cNvPr>
-          <p:cNvSpPr txBox="1"/>
-          <p:nvPr/>
-        </p:nvSpPr>
-        <p:spPr>
-          <a:xfrm>
-            <a:off x="6553200" y="1905000"/>
-            <a:ext cx="4518800" cy="3970318"/>
-          </a:xfrm>
-          <a:prstGeom prst="rect">
-            <a:avLst/>
-          </a:prstGeom>
-          <a:noFill/>
-        </p:spPr>
-        <p:txBody>
-          <a:bodyPr wrap="square" rtlCol="0">
-            <a:spAutoFit/>
-          </a:bodyPr>
-          <a:lstStyle/>
-          <a:p>
-            <a:pPr lvl="0"/>
-            <a:r>
-              <a:rPr lang="zh-CN" altLang="en-US" b="1" dirty="0"/>
-              <a:t>案例：</a:t>
-            </a:r>
-            <a:endParaRPr lang="en-US" altLang="zh-CN" b="1" dirty="0"/>
-          </a:p>
-          <a:p>
-            <a:pPr lvl="0"/>
-            <a:r>
-              <a:rPr lang="zh-CN" altLang="en-US" dirty="0"/>
-              <a:t>你发现跟你联系的</a:t>
-            </a:r>
-            <a:r>
-              <a:rPr lang="en-US" dirty="0"/>
-              <a:t>”</a:t>
-            </a:r>
-            <a:r>
-              <a:rPr lang="zh-CN" altLang="en-US" dirty="0"/>
-              <a:t>客户</a:t>
-            </a:r>
-            <a:r>
-              <a:rPr lang="en-US" dirty="0"/>
-              <a:t>” </a:t>
-            </a:r>
-            <a:r>
-              <a:rPr lang="zh-CN" altLang="en-US" dirty="0"/>
-              <a:t>不是真的客户， 而是转手把他接到的活转包给你了，但是你见不到用户，你只跟转包的二道贩子交流。</a:t>
-            </a:r>
-            <a:endParaRPr lang="en-US" altLang="zh-CN" dirty="0"/>
-          </a:p>
-          <a:p>
-            <a:pPr lvl="0"/>
-            <a:r>
-              <a:rPr lang="zh-CN" altLang="en-US" dirty="0"/>
-              <a:t> </a:t>
-            </a:r>
-            <a:endParaRPr lang="en-US" dirty="0"/>
-          </a:p>
-          <a:p>
-            <a:pPr lvl="0"/>
-            <a:r>
-              <a:rPr lang="zh-CN" altLang="en-US" dirty="0"/>
-              <a:t>用户声称这是一个</a:t>
-            </a:r>
-            <a:r>
-              <a:rPr lang="en-US" dirty="0"/>
-              <a:t> "</a:t>
-            </a:r>
-            <a:r>
-              <a:rPr lang="zh-CN" altLang="en-US" dirty="0"/>
-              <a:t>小案子</a:t>
-            </a:r>
-            <a:r>
-              <a:rPr lang="en-US" dirty="0"/>
-              <a:t>",   "</a:t>
-            </a:r>
-            <a:r>
-              <a:rPr lang="zh-CN" altLang="en-US" dirty="0"/>
-              <a:t>用开源程序改一下就行</a:t>
-            </a:r>
-            <a:r>
-              <a:rPr lang="en-US" dirty="0"/>
-              <a:t>"</a:t>
-            </a:r>
-            <a:r>
-              <a:rPr lang="zh-CN" altLang="en-US" dirty="0"/>
-              <a:t>。</a:t>
-            </a:r>
-            <a:endParaRPr lang="en-US" altLang="zh-CN" dirty="0"/>
-          </a:p>
-          <a:p>
-            <a:pPr lvl="0"/>
-            <a:endParaRPr lang="en-US" dirty="0"/>
-          </a:p>
-          <a:p>
-            <a:pPr lvl="0"/>
-            <a:r>
-              <a:rPr lang="zh-CN" altLang="en-US" dirty="0"/>
-              <a:t>客户声称</a:t>
-            </a:r>
-            <a:r>
-              <a:rPr lang="en-US" dirty="0"/>
-              <a:t>  “</a:t>
-            </a:r>
-            <a:r>
-              <a:rPr lang="zh-CN" altLang="en-US" dirty="0"/>
-              <a:t>目前钱不多， 但是优秀者以后会给股份</a:t>
-            </a:r>
-            <a:r>
-              <a:rPr lang="en-US" dirty="0"/>
-              <a:t>"</a:t>
-            </a:r>
-          </a:p>
-          <a:p>
-            <a:pPr lvl="0"/>
-            <a:r>
-              <a:rPr lang="zh-CN" altLang="en-US" dirty="0"/>
-              <a:t>客户不签合同</a:t>
-            </a:r>
-            <a:r>
-              <a:rPr lang="en-US" dirty="0"/>
-              <a:t>, </a:t>
-            </a:r>
-            <a:r>
-              <a:rPr lang="zh-CN" altLang="en-US" dirty="0"/>
-              <a:t>不给预付金。 </a:t>
-            </a:r>
-            <a:endParaRPr lang="en-US" dirty="0"/>
-          </a:p>
-          <a:p>
-            <a:endParaRPr lang="en-US" dirty="0"/>
-          </a:p>
-          <a:p>
-            <a:endParaRPr lang="en-US" dirty="0"/>
-          </a:p>
-        </p:txBody>
-      </p:sp>
-    </p:spTree>
-  </p:cSld>
-  <p:clrMapOvr>
-    <a:masterClrMapping/>
-  </p:clrMapOvr>
-</p:sld>
-</file>
-
 <file path=ppt/slides/slide57.xml><?xml version="1.0" encoding="utf-8"?>
 <p:sld xmlns:a="http://schemas.openxmlformats.org/drawingml/2006/main" xmlns:r="http://schemas.openxmlformats.org/officeDocument/2006/relationships" xmlns:p="http://schemas.openxmlformats.org/presentationml/2006/main">
   <p:cSld>
@@ -31377,154 +30438,225 @@
             <p:ph idx="1"/>
           </p:nvPr>
         </p:nvSpPr>
-        <p:spPr/>
+        <p:spPr>
+          <a:xfrm>
+            <a:off x="1120000" y="1825625"/>
+            <a:ext cx="5052200" cy="4351338"/>
+          </a:xfrm>
+        </p:spPr>
         <p:txBody>
           <a:bodyPr/>
           <a:lstStyle/>
           <a:p>
             <a:r>
-              <a:rPr lang="en-US" altLang="zh-CN" dirty="0"/>
-              <a:t>PM </a:t>
+              <a:rPr lang="en-US" dirty="0"/>
+              <a:t>PM  </a:t>
             </a:r>
             <a:r>
               <a:rPr lang="zh-CN" altLang="en-US" dirty="0"/>
-              <a:t>对项目所有功能的把握</a:t>
-            </a:r>
-            <a:r>
-              <a:rPr lang="en-US" altLang="zh-CN" dirty="0"/>
+              <a:t>在敏捷开发模式中负责和用户打交道， 为自己的团队争取最大的短期和长期利益。</a:t>
+            </a:r>
+            <a:endParaRPr lang="en-US" dirty="0"/>
+          </a:p>
+          <a:p>
+            <a:r>
+              <a:rPr lang="en-US" dirty="0"/>
+              <a:t> </a:t>
+            </a:r>
+            <a:r>
+              <a:rPr lang="zh-CN" altLang="en-US" dirty="0"/>
+              <a:t>在软件兼职项目中，有很多不同的任务和完成任务的条件，下面的任务都有什么样的风险</a:t>
+            </a:r>
+            <a:r>
+              <a:rPr lang="en-US" dirty="0"/>
+              <a:t>?  </a:t>
+            </a:r>
+            <a:r>
+              <a:rPr lang="zh-CN" altLang="en-US" dirty="0"/>
+              <a:t>你如何应对</a:t>
+            </a:r>
+            <a:r>
+              <a:rPr lang="en-US" dirty="0"/>
+              <a:t>?  </a:t>
+            </a:r>
+            <a:r>
+              <a:rPr lang="zh-CN" altLang="en-US" dirty="0"/>
+              <a:t>你作为团队的</a:t>
+            </a:r>
+            <a:r>
+              <a:rPr lang="en-US" dirty="0"/>
+              <a:t>PM  </a:t>
+            </a:r>
+            <a:r>
+              <a:rPr lang="zh-CN" altLang="en-US" dirty="0"/>
+              <a:t>你决定接手这个项目么</a:t>
+            </a:r>
+            <a:r>
+              <a:rPr lang="en-US" dirty="0"/>
+              <a:t>? </a:t>
+            </a:r>
+          </a:p>
+          <a:p>
+            <a:r>
+              <a:rPr lang="en-US" dirty="0"/>
+              <a:t>  </a:t>
+            </a:r>
+          </a:p>
+          <a:p>
+            <a:pPr marL="0" indent="0">
+              <a:buNone/>
+            </a:pPr>
+            <a:endParaRPr lang="en-US" dirty="0"/>
+          </a:p>
+        </p:txBody>
+      </p:sp>
+      <p:sp>
+        <p:nvSpPr>
+          <p:cNvPr id="4" name="TextBox 3">
+            <a:extLst>
+              <a:ext uri="{FF2B5EF4-FFF2-40B4-BE49-F238E27FC236}">
+                <a16:creationId xmlns:a16="http://schemas.microsoft.com/office/drawing/2014/main" id="{E1FBD344-3558-4F9A-8582-20F723F5FC26}"/>
+              </a:ext>
+            </a:extLst>
+          </p:cNvPr>
+          <p:cNvSpPr txBox="1"/>
+          <p:nvPr/>
+        </p:nvSpPr>
+        <p:spPr>
+          <a:xfrm>
+            <a:off x="6553200" y="1905000"/>
+            <a:ext cx="4518800" cy="3970318"/>
+          </a:xfrm>
+          <a:prstGeom prst="rect">
+            <a:avLst/>
+          </a:prstGeom>
+          <a:noFill/>
+        </p:spPr>
+        <p:txBody>
+          <a:bodyPr wrap="square" rtlCol="0">
+            <a:spAutoFit/>
+          </a:bodyPr>
+          <a:lstStyle/>
+          <a:p>
+            <a:pPr lvl="0"/>
+            <a:r>
+              <a:rPr lang="zh-CN" altLang="en-US" b="1" dirty="0"/>
+              <a:t>案例：</a:t>
+            </a:r>
+            <a:endParaRPr lang="en-US" altLang="zh-CN" b="1" dirty="0"/>
+          </a:p>
+          <a:p>
+            <a:pPr lvl="0"/>
+            <a:r>
+              <a:rPr lang="zh-CN" altLang="en-US" dirty="0"/>
+              <a:t>你发现跟你联系的</a:t>
+            </a:r>
+            <a:r>
+              <a:rPr lang="en-US" dirty="0"/>
+              <a:t>”</a:t>
+            </a:r>
+            <a:r>
+              <a:rPr lang="zh-CN" altLang="en-US" dirty="0"/>
+              <a:t>客户</a:t>
+            </a:r>
+            <a:r>
+              <a:rPr lang="en-US" dirty="0"/>
+              <a:t>” </a:t>
+            </a:r>
+            <a:r>
+              <a:rPr lang="zh-CN" altLang="en-US" dirty="0"/>
+              <a:t>不是真的客户， 而是转手把他接到的活转包给你了，但是你见不到用户，你只跟转包的二道贩子交流。</a:t>
+            </a:r>
+            <a:endParaRPr lang="en-US" altLang="zh-CN" dirty="0"/>
+          </a:p>
+          <a:p>
+            <a:pPr lvl="0"/>
+            <a:r>
+              <a:rPr lang="zh-CN" altLang="en-US" dirty="0"/>
+              <a:t> </a:t>
+            </a:r>
+            <a:endParaRPr lang="en-US" dirty="0"/>
+          </a:p>
+          <a:p>
+            <a:pPr lvl="0"/>
+            <a:r>
+              <a:rPr lang="zh-CN" altLang="en-US" dirty="0"/>
+              <a:t>用户声称这是一个</a:t>
+            </a:r>
+            <a:r>
+              <a:rPr lang="en-US" dirty="0"/>
+              <a:t> "</a:t>
+            </a:r>
+            <a:r>
+              <a:rPr lang="zh-CN" altLang="en-US" dirty="0"/>
+              <a:t>小案子</a:t>
+            </a:r>
+            <a:r>
+              <a:rPr lang="en-US" dirty="0"/>
+              <a:t>",   "</a:t>
+            </a:r>
+            <a:r>
+              <a:rPr lang="zh-CN" altLang="en-US" dirty="0"/>
+              <a:t>用开源程序改一下就行</a:t>
+            </a:r>
+            <a:r>
+              <a:rPr lang="en-US" dirty="0"/>
+              <a:t>"</a:t>
+            </a:r>
+            <a:r>
+              <a:rPr lang="zh-CN" altLang="en-US" dirty="0"/>
+              <a:t>。</a:t>
+            </a:r>
+            <a:endParaRPr lang="en-US" altLang="zh-CN" dirty="0"/>
+          </a:p>
+          <a:p>
+            <a:pPr lvl="0"/>
+            <a:endParaRPr lang="en-US" dirty="0"/>
+          </a:p>
+          <a:p>
+            <a:pPr lvl="0"/>
+            <a:r>
+              <a:rPr lang="zh-CN" altLang="en-US" dirty="0"/>
+              <a:t>客户声称</a:t>
+            </a:r>
+            <a:r>
+              <a:rPr lang="en-US" dirty="0"/>
+              <a:t>  “</a:t>
+            </a:r>
+            <a:r>
+              <a:rPr lang="zh-CN" altLang="en-US" dirty="0"/>
+              <a:t>目前钱不多， 但是优秀者以后会给股份</a:t>
+            </a:r>
+            <a:r>
+              <a:rPr lang="en-US" dirty="0"/>
+              <a:t>"</a:t>
+            </a:r>
+          </a:p>
+          <a:p>
+            <a:pPr lvl="0"/>
+            <a:r>
+              <a:rPr lang="zh-CN" altLang="en-US" dirty="0"/>
+              <a:t>客户不签合同</a:t>
+            </a:r>
+            <a:r>
+              <a:rPr lang="en-US" dirty="0"/>
               <a:t>, </a:t>
             </a:r>
             <a:r>
               <a:rPr lang="zh-CN" altLang="en-US" dirty="0"/>
-              <a:t>特别是</a:t>
-            </a:r>
-            <a:r>
-              <a:rPr lang="en-US" altLang="zh-CN" dirty="0"/>
-              <a:t>UX</a:t>
-            </a:r>
-          </a:p>
-          <a:p>
-            <a:pPr lvl="1"/>
-            <a:r>
-              <a:rPr lang="zh-CN" altLang="en-US" dirty="0"/>
-              <a:t>最差的</a:t>
-            </a:r>
-            <a:r>
-              <a:rPr lang="en-US" altLang="zh-CN" dirty="0"/>
-              <a:t>UX, </a:t>
-            </a:r>
-            <a:r>
-              <a:rPr lang="zh-CN" altLang="en-US" dirty="0"/>
-              <a:t>体现了团队的组织架构</a:t>
-            </a:r>
-            <a:endParaRPr lang="en-US" altLang="zh-CN" dirty="0"/>
-          </a:p>
-          <a:p>
-            <a:pPr lvl="1"/>
-            <a:r>
-              <a:rPr lang="zh-CN" altLang="en-US" dirty="0"/>
-              <a:t>其次</a:t>
-            </a:r>
-            <a:r>
-              <a:rPr lang="en-US" altLang="zh-CN" dirty="0"/>
-              <a:t>, </a:t>
-            </a:r>
-            <a:r>
-              <a:rPr lang="zh-CN" altLang="en-US" dirty="0"/>
-              <a:t>体现了产品的内部结构</a:t>
-            </a:r>
-            <a:endParaRPr lang="en-US" altLang="zh-CN" dirty="0"/>
-          </a:p>
-          <a:p>
-            <a:pPr lvl="1"/>
-            <a:r>
-              <a:rPr lang="zh-CN" altLang="en-US" dirty="0"/>
-              <a:t>最好</a:t>
-            </a:r>
-            <a:r>
-              <a:rPr lang="en-US" altLang="zh-CN" dirty="0"/>
-              <a:t>, </a:t>
-            </a:r>
-            <a:r>
-              <a:rPr lang="zh-CN" altLang="en-US" dirty="0"/>
-              <a:t>体现了用户的自然需求</a:t>
-            </a:r>
-            <a:endParaRPr lang="en-US" altLang="zh-CN" dirty="0"/>
-          </a:p>
-          <a:p>
-            <a:pPr lvl="1"/>
+              <a:t>不给预付金。 </a:t>
+            </a:r>
             <a:endParaRPr lang="en-US" dirty="0"/>
           </a:p>
           <a:p>
-            <a:r>
-              <a:rPr lang="zh-CN" altLang="en-US" dirty="0"/>
-              <a:t>在常用的网站中</a:t>
-            </a:r>
-            <a:r>
-              <a:rPr lang="en-US" altLang="zh-CN" dirty="0"/>
-              <a:t>, </a:t>
-            </a:r>
-            <a:r>
-              <a:rPr lang="zh-CN" altLang="en-US" dirty="0"/>
-              <a:t>找出这些例子</a:t>
-            </a:r>
-            <a:endParaRPr lang="en-US" altLang="zh-CN" dirty="0"/>
-          </a:p>
-          <a:p>
-            <a:pPr lvl="1"/>
-            <a:r>
-              <a:rPr lang="zh-CN" altLang="en-US" dirty="0"/>
-              <a:t>学校的网站 </a:t>
-            </a:r>
-            <a:r>
-              <a:rPr lang="en-US" altLang="zh-CN" dirty="0"/>
-              <a:t>(</a:t>
-            </a:r>
-            <a:r>
-              <a:rPr lang="zh-CN" altLang="en-US" dirty="0"/>
-              <a:t>学校领导</a:t>
-            </a:r>
-            <a:r>
-              <a:rPr lang="en-US" altLang="zh-CN" dirty="0"/>
-              <a:t>/</a:t>
-            </a:r>
-            <a:r>
-              <a:rPr lang="zh-CN" altLang="en-US" dirty="0"/>
-              <a:t>历届领导</a:t>
-            </a:r>
-            <a:r>
-              <a:rPr lang="en-US" altLang="zh-CN" dirty="0"/>
-              <a:t>)</a:t>
-            </a:r>
-          </a:p>
-          <a:p>
-            <a:pPr lvl="1"/>
-            <a:r>
-              <a:rPr lang="en-US" altLang="zh-CN" dirty="0"/>
-              <a:t>Word </a:t>
-            </a:r>
-            <a:r>
-              <a:rPr lang="zh-CN" altLang="en-US" dirty="0"/>
-              <a:t>的 </a:t>
-            </a:r>
-            <a:r>
-              <a:rPr lang="en-US" altLang="zh-CN" dirty="0"/>
-              <a:t>ribbon </a:t>
-            </a:r>
-            <a:r>
-              <a:rPr lang="zh-CN" altLang="en-US" dirty="0"/>
-              <a:t>界面等。</a:t>
-            </a:r>
             <a:endParaRPr lang="en-US" dirty="0"/>
           </a:p>
+          <a:p>
+            <a:endParaRPr lang="en-US" dirty="0"/>
+          </a:p>
         </p:txBody>
       </p:sp>
     </p:spTree>
-    <p:extLst>
-      <p:ext uri="{BB962C8B-B14F-4D97-AF65-F5344CB8AC3E}">
-        <p14:creationId xmlns:p14="http://schemas.microsoft.com/office/powerpoint/2010/main" val="3037766885"/>
-      </p:ext>
-    </p:extLst>
   </p:cSld>
   <p:clrMapOvr>
     <a:masterClrMapping/>
@@ -31565,10 +30697,9 @@
           <a:lstStyle/>
           <a:p>
             <a:r>
-              <a:rPr lang="en-US" altLang="zh-CN" dirty="0"/>
-              <a:t>Summary</a:t>
-            </a:r>
-            <a:endParaRPr lang="en-US" dirty="0"/>
+              <a:rPr lang="en-US" dirty="0"/>
+              <a:t>Exercise</a:t>
+            </a:r>
           </a:p>
         </p:txBody>
       </p:sp>
@@ -31589,73 +30720,147 @@
           <a:p>
             <a:r>
               <a:rPr lang="en-US" altLang="zh-CN" dirty="0"/>
-              <a:t>History of PM</a:t>
-            </a:r>
-          </a:p>
-          <a:p>
+              <a:t>PM </a:t>
+            </a:r>
+            <a:r>
+              <a:rPr lang="zh-CN" altLang="en-US" dirty="0"/>
+              <a:t>对项目所有功能的把握</a:t>
+            </a:r>
             <a:r>
               <a:rPr lang="en-US" altLang="zh-CN" dirty="0"/>
-              <a:t>Role of PM</a:t>
-            </a:r>
-          </a:p>
-          <a:p>
+              <a:t>, </a:t>
+            </a:r>
+            <a:r>
+              <a:rPr lang="zh-CN" altLang="en-US" dirty="0"/>
+              <a:t>特别是</a:t>
+            </a:r>
             <a:r>
               <a:rPr lang="en-US" altLang="zh-CN" dirty="0"/>
-              <a:t>Impact of PM</a:t>
-            </a:r>
-          </a:p>
-          <a:p>
+              <a:t>UX</a:t>
+            </a:r>
+          </a:p>
+          <a:p>
+            <a:pPr lvl="1"/>
+            <a:r>
+              <a:rPr lang="zh-CN" altLang="en-US" dirty="0"/>
+              <a:t>最差的</a:t>
+            </a:r>
+            <a:r>
+              <a:rPr lang="en-US" altLang="zh-CN" dirty="0"/>
+              <a:t>UX, </a:t>
+            </a:r>
+            <a:r>
+              <a:rPr lang="zh-CN" altLang="en-US" dirty="0"/>
+              <a:t>体现了团队的组织架构</a:t>
+            </a:r>
+            <a:endParaRPr lang="en-US" altLang="zh-CN" dirty="0"/>
+          </a:p>
+          <a:p>
+            <a:pPr lvl="1"/>
+            <a:r>
+              <a:rPr lang="zh-CN" altLang="en-US" dirty="0"/>
+              <a:t>其次</a:t>
+            </a:r>
+            <a:r>
+              <a:rPr lang="en-US" altLang="zh-CN" dirty="0"/>
+              <a:t>, </a:t>
+            </a:r>
+            <a:r>
+              <a:rPr lang="zh-CN" altLang="en-US" dirty="0"/>
+              <a:t>体现了产品的内部结构</a:t>
+            </a:r>
+            <a:endParaRPr lang="en-US" altLang="zh-CN" dirty="0"/>
+          </a:p>
+          <a:p>
+            <a:pPr lvl="1"/>
+            <a:r>
+              <a:rPr lang="zh-CN" altLang="en-US" dirty="0"/>
+              <a:t>最好</a:t>
+            </a:r>
+            <a:r>
+              <a:rPr lang="en-US" altLang="zh-CN" dirty="0"/>
+              <a:t>, </a:t>
+            </a:r>
+            <a:r>
+              <a:rPr lang="zh-CN" altLang="en-US" dirty="0"/>
+              <a:t>体现了用户的自然需求</a:t>
+            </a:r>
+            <a:endParaRPr lang="en-US" altLang="zh-CN" dirty="0"/>
+          </a:p>
+          <a:p>
+            <a:pPr lvl="1"/>
             <a:endParaRPr lang="en-US" dirty="0"/>
           </a:p>
           <a:p>
             <a:r>
+              <a:rPr lang="zh-CN" altLang="en-US" dirty="0"/>
+              <a:t>在常用的网站中</a:t>
+            </a:r>
+            <a:r>
               <a:rPr lang="en-US" altLang="zh-CN" dirty="0"/>
-              <a:t>Q&amp;A</a:t>
-            </a:r>
-          </a:p>
-          <a:p>
+              <a:t>, </a:t>
+            </a:r>
+            <a:r>
+              <a:rPr lang="zh-CN" altLang="en-US" dirty="0"/>
+              <a:t>找出这些例子</a:t>
+            </a:r>
+            <a:endParaRPr lang="en-US" altLang="zh-CN" dirty="0"/>
+          </a:p>
+          <a:p>
+            <a:pPr lvl="1"/>
+            <a:r>
+              <a:rPr lang="zh-CN" altLang="en-US" dirty="0"/>
+              <a:t>学校的网站 </a:t>
+            </a:r>
             <a:r>
               <a:rPr lang="en-US" altLang="zh-CN" dirty="0"/>
-              <a:t>Book for PM:</a:t>
-            </a:r>
-          </a:p>
-          <a:p>
-            <a:pPr lvl="1"/>
+              <a:t>(</a:t>
+            </a:r>
+            <a:r>
+              <a:rPr lang="zh-CN" altLang="en-US" dirty="0"/>
+              <a:t>学校领导</a:t>
+            </a:r>
             <a:r>
               <a:rPr lang="en-US" altLang="zh-CN" dirty="0"/>
-              <a:t>The Art of Project Management</a:t>
-            </a:r>
-          </a:p>
-          <a:p>
-            <a:pPr lvl="1"/>
-            <a:r>
-              <a:rPr lang="en-US" altLang="zh-CN" dirty="0"/>
-              <a:t>The Power of Persuasion</a:t>
-            </a:r>
-          </a:p>
-          <a:p>
-            <a:pPr lvl="1"/>
-            <a:r>
-              <a:rPr lang="en-US" altLang="zh-CN" dirty="0" err="1"/>
-              <a:t>PeopleWare</a:t>
-            </a:r>
-            <a:r>
-              <a:rPr lang="en-US" altLang="zh-CN" dirty="0"/>
-              <a:t> (</a:t>
+              <a:t>/</a:t>
             </a:r>
             <a:r>
               <a:rPr lang="zh-CN" altLang="en-US" dirty="0"/>
-              <a:t>人件</a:t>
+              <a:t>历届领导</a:t>
             </a:r>
             <a:r>
               <a:rPr lang="en-US" altLang="zh-CN" dirty="0"/>
               <a:t>)</a:t>
             </a:r>
+          </a:p>
+          <a:p>
+            <a:pPr lvl="1"/>
+            <a:r>
+              <a:rPr lang="en-US" altLang="zh-CN" dirty="0"/>
+              <a:t>Word </a:t>
+            </a:r>
+            <a:r>
+              <a:rPr lang="zh-CN" altLang="en-US" dirty="0"/>
+              <a:t>的 </a:t>
+            </a:r>
+            <a:r>
+              <a:rPr lang="en-US" altLang="zh-CN" dirty="0"/>
+              <a:t>ribbon </a:t>
+            </a:r>
+            <a:r>
+              <a:rPr lang="zh-CN" altLang="en-US" dirty="0"/>
+              <a:t>界面等。</a:t>
+            </a:r>
             <a:endParaRPr lang="en-US" dirty="0"/>
           </a:p>
         </p:txBody>
       </p:sp>
     </p:spTree>
+    <p:extLst>
+      <p:ext uri="{BB962C8B-B14F-4D97-AF65-F5344CB8AC3E}">
+        <p14:creationId xmlns:p14="http://schemas.microsoft.com/office/powerpoint/2010/main" val="3037766885"/>
+      </p:ext>
+    </p:extLst>
   </p:cSld>
   <p:clrMapOvr>
     <a:masterClrMapping/>
@@ -31682,13 +30887,7 @@
       </p:grpSpPr>
       <p:sp>
         <p:nvSpPr>
-          <p:cNvPr id="2" name="Title 1">
-            <a:extLst>
-              <a:ext uri="{FF2B5EF4-FFF2-40B4-BE49-F238E27FC236}">
-                <a16:creationId xmlns:a16="http://schemas.microsoft.com/office/drawing/2014/main" id="{C53B4456-2C2A-4A21-BC3F-141A0D4BE4D4}"/>
-              </a:ext>
-            </a:extLst>
-          </p:cNvPr>
+          <p:cNvPr id="2" name="Title 1"/>
           <p:cNvSpPr>
             <a:spLocks noGrp="1"/>
           </p:cNvSpPr>
@@ -31702,8 +30901,8 @@
           <a:lstStyle/>
           <a:p>
             <a:r>
-              <a:rPr lang="zh-CN" altLang="en-US" dirty="0"/>
-              <a:t>更多练习</a:t>
+              <a:rPr lang="en-US" altLang="zh-CN" dirty="0"/>
+              <a:t>Summary</a:t>
             </a:r>
             <a:endParaRPr lang="en-US" dirty="0"/>
           </a:p>
@@ -31711,13 +30910,7 @@
       </p:sp>
       <p:sp>
         <p:nvSpPr>
-          <p:cNvPr id="3" name="Content Placeholder 2">
-            <a:extLst>
-              <a:ext uri="{FF2B5EF4-FFF2-40B4-BE49-F238E27FC236}">
-                <a16:creationId xmlns:a16="http://schemas.microsoft.com/office/drawing/2014/main" id="{24647FCB-119E-4B79-83F5-D9B25D19F51C}"/>
-              </a:ext>
-            </a:extLst>
-          </p:cNvPr>
+          <p:cNvPr id="3" name="Content Placeholder 2"/>
           <p:cNvSpPr>
             <a:spLocks noGrp="1"/>
           </p:cNvSpPr>
@@ -31731,24 +30924,74 @@
           <a:lstStyle/>
           <a:p>
             <a:r>
-              <a:rPr lang="en-US">
-                <a:hlinkClick r:id="rId2"/>
-              </a:rPr>
-              <a:t>http://www.cnblogs.com/xinz/p/3855189.html</a:t>
-            </a:r>
-            <a:endParaRPr lang="en-US"/>
+              <a:rPr lang="en-US" altLang="zh-CN" dirty="0"/>
+              <a:t>History of PM</a:t>
+            </a:r>
+          </a:p>
+          <a:p>
+            <a:r>
+              <a:rPr lang="en-US" altLang="zh-CN" dirty="0"/>
+              <a:t>Role of PM</a:t>
+            </a:r>
+          </a:p>
+          <a:p>
+            <a:r>
+              <a:rPr lang="en-US" altLang="zh-CN" dirty="0"/>
+              <a:t>Impact of PM</a:t>
+            </a:r>
           </a:p>
           <a:p>
             <a:endParaRPr lang="en-US" dirty="0"/>
           </a:p>
+          <a:p>
+            <a:r>
+              <a:rPr lang="en-US" altLang="zh-CN" dirty="0"/>
+              <a:t>Q&amp;A</a:t>
+            </a:r>
+          </a:p>
+          <a:p>
+            <a:r>
+              <a:rPr lang="en-US" altLang="zh-CN" dirty="0"/>
+              <a:t>Book for PM:</a:t>
+            </a:r>
+          </a:p>
+          <a:p>
+            <a:pPr lvl="1"/>
+            <a:r>
+              <a:rPr lang="en-US" altLang="zh-CN" dirty="0"/>
+              <a:t>The Art of Project Management</a:t>
+            </a:r>
+          </a:p>
+          <a:p>
+            <a:pPr lvl="1"/>
+            <a:r>
+              <a:rPr lang="en-US" altLang="zh-CN" dirty="0"/>
+              <a:t>The Power of Persuasion</a:t>
+            </a:r>
+          </a:p>
+          <a:p>
+            <a:pPr lvl="1"/>
+            <a:r>
+              <a:rPr lang="en-US" altLang="zh-CN" dirty="0" err="1"/>
+              <a:t>PeopleWare</a:t>
+            </a:r>
+            <a:r>
+              <a:rPr lang="en-US" altLang="zh-CN" dirty="0"/>
+              <a:t> (</a:t>
+            </a:r>
+            <a:r>
+              <a:rPr lang="zh-CN" altLang="en-US" dirty="0"/>
+              <a:t>人件</a:t>
+            </a:r>
+            <a:r>
+              <a:rPr lang="en-US" altLang="zh-CN" dirty="0"/>
+              <a:t>)</a:t>
+            </a:r>
+            <a:endParaRPr lang="en-US" dirty="0"/>
+          </a:p>
         </p:txBody>
       </p:sp>
     </p:spTree>
-    <p:extLst>
-      <p:ext uri="{BB962C8B-B14F-4D97-AF65-F5344CB8AC3E}">
-        <p14:creationId xmlns:p14="http://schemas.microsoft.com/office/powerpoint/2010/main" val="1136788009"/>
-      </p:ext>
-    </p:extLst>
   </p:cSld>
   <p:clrMapOvr>
     <a:masterClrMapping/>
@@ -31822,7 +31065,7 @@
             <a:pPr lvl="1"/>
             <a:r>
               <a:rPr lang="en-US" altLang="zh-CN" dirty="0"/>
-              <a:t>Master Programmer vs. Slave Programmer</a:t>
+              <a:t>Meta Programmer vs. Individual Contributor</a:t>
             </a:r>
           </a:p>
           <a:p>
@@ -31846,11 +31089,11 @@
           <a:p>
             <a:r>
               <a:rPr lang="en-US" altLang="zh-CN" dirty="0"/>
-              <a:t>Slave/Junior Programmer </a:t>
+              <a:t>Individual Contributor </a:t>
             </a:r>
             <a:r>
               <a:rPr lang="zh-CN" altLang="en-US" dirty="0"/>
-              <a:t>小工程序员</a:t>
+              <a:t>做个人贡献</a:t>
             </a:r>
             <a:endParaRPr lang="en-US" altLang="zh-CN" dirty="0"/>
           </a:p>
@@ -31883,7 +31126,15 @@
           <a:p>
             <a:r>
               <a:rPr lang="zh-CN" altLang="en-US" dirty="0"/>
-              <a:t>但是，没有人愿意做 “小工程序员”， 学徒</a:t>
+              <a:t>但是，没有人愿意做 “</a:t>
+            </a:r>
+            <a:r>
+              <a:rPr lang="en-US" altLang="zh-CN" dirty="0"/>
+              <a:t>Individual Contributor</a:t>
+            </a:r>
+            <a:r>
+              <a:rPr lang="zh-CN" altLang="en-US" dirty="0"/>
+              <a:t>”， 学徒</a:t>
             </a:r>
             <a:endParaRPr lang="en-US" dirty="0"/>
           </a:p>
@@ -32404,6 +31655,99 @@
       <p:bldP spid="3" grpId="0" build="p"/>
     </p:bldLst>
   </p:timing>
+</p:sld>
+</file>
+
+<file path=ppt/slides/slide60.xml><?xml version="1.0" encoding="utf-8"?>
+<p:sld xmlns:a="http://schemas.openxmlformats.org/drawingml/2006/main" xmlns:r="http://schemas.openxmlformats.org/officeDocument/2006/relationships" xmlns:p="http://schemas.openxmlformats.org/presentationml/2006/main">
+  <p:cSld>
+    <p:spTree>
+      <p:nvGrpSpPr>
+        <p:cNvPr id="1" name=""/>
+        <p:cNvGrpSpPr/>
+        <p:nvPr/>
+      </p:nvGrpSpPr>
+      <p:grpSpPr>
+        <a:xfrm>
+          <a:off x="0" y="0"/>
+          <a:ext cx="0" cy="0"/>
+          <a:chOff x="0" y="0"/>
+          <a:chExt cx="0" cy="0"/>
+        </a:xfrm>
+      </p:grpSpPr>
+      <p:sp>
+        <p:nvSpPr>
+          <p:cNvPr id="2" name="Title 1">
+            <a:extLst>
+              <a:ext uri="{FF2B5EF4-FFF2-40B4-BE49-F238E27FC236}">
+                <a16:creationId xmlns:a16="http://schemas.microsoft.com/office/drawing/2014/main" id="{C53B4456-2C2A-4A21-BC3F-141A0D4BE4D4}"/>
+              </a:ext>
+            </a:extLst>
+          </p:cNvPr>
+          <p:cNvSpPr>
+            <a:spLocks noGrp="1"/>
+          </p:cNvSpPr>
+          <p:nvPr>
+            <p:ph type="title"/>
+          </p:nvPr>
+        </p:nvSpPr>
+        <p:spPr/>
+        <p:txBody>
+          <a:bodyPr/>
+          <a:lstStyle/>
+          <a:p>
+            <a:r>
+              <a:rPr lang="zh-CN" altLang="en-US" dirty="0"/>
+              <a:t>更多练习</a:t>
+            </a:r>
+            <a:endParaRPr lang="en-US" dirty="0"/>
+          </a:p>
+        </p:txBody>
+      </p:sp>
+      <p:sp>
+        <p:nvSpPr>
+          <p:cNvPr id="3" name="Content Placeholder 2">
+            <a:extLst>
+              <a:ext uri="{FF2B5EF4-FFF2-40B4-BE49-F238E27FC236}">
+                <a16:creationId xmlns:a16="http://schemas.microsoft.com/office/drawing/2014/main" id="{24647FCB-119E-4B79-83F5-D9B25D19F51C}"/>
+              </a:ext>
+            </a:extLst>
+          </p:cNvPr>
+          <p:cNvSpPr>
+            <a:spLocks noGrp="1"/>
+          </p:cNvSpPr>
+          <p:nvPr>
+            <p:ph idx="1"/>
+          </p:nvPr>
+        </p:nvSpPr>
+        <p:spPr/>
+        <p:txBody>
+          <a:bodyPr/>
+          <a:lstStyle/>
+          <a:p>
+            <a:r>
+              <a:rPr lang="en-US" dirty="0">
+                <a:hlinkClick r:id="rId2"/>
+              </a:rPr>
+              <a:t>http://www.cnblogs.com/xinz/p/3855189.html</a:t>
+            </a:r>
+            <a:endParaRPr lang="en-US" dirty="0"/>
+          </a:p>
+          <a:p>
+            <a:endParaRPr lang="en-US" dirty="0"/>
+          </a:p>
+        </p:txBody>
+      </p:sp>
+    </p:spTree>
+    <p:extLst>
+      <p:ext uri="{BB962C8B-B14F-4D97-AF65-F5344CB8AC3E}">
+        <p14:creationId xmlns:p14="http://schemas.microsoft.com/office/powerpoint/2010/main" val="1136788009"/>
+      </p:ext>
+    </p:extLst>
+  </p:cSld>
+  <p:clrMapOvr>
+    <a:masterClrMapping/>
+  </p:clrMapOvr>
 </p:sld>
 </file>
 
@@ -34909,12 +34253,6 @@
 </file>
 
 <file path=customXml/item1.xml><?xml version="1.0" encoding="utf-8"?>
-<p:properties xmlns:p="http://schemas.microsoft.com/office/2006/metadata/properties" xmlns:xsi="http://www.w3.org/2001/XMLSchema-instance" xmlns:pc="http://schemas.microsoft.com/office/infopath/2007/PartnerControls">
-  <documentManagement/>
-</p:properties>
-</file>
-
-<file path=customXml/item2.xml><?xml version="1.0" encoding="utf-8"?>
 <ct:contentTypeSchema xmlns:ct="http://schemas.microsoft.com/office/2006/metadata/contentType" xmlns:ma="http://schemas.microsoft.com/office/2006/metadata/properties/metaAttributes" ct:_="" ma:_="" ma:contentTypeName="Document" ma:contentTypeID="0x0101006371182FA640024E8A2815D490E1EF25" ma:contentTypeVersion="0" ma:contentTypeDescription="Create a new document." ma:contentTypeScope="" ma:versionID="3591aab47f172a2900f307f59d422227">
   <xsd:schema xmlns:xsd="http://www.w3.org/2001/XMLSchema" xmlns:xs="http://www.w3.org/2001/XMLSchema" xmlns:p="http://schemas.microsoft.com/office/2006/metadata/properties" targetNamespace="http://schemas.microsoft.com/office/2006/metadata/properties" ma:root="true" ma:fieldsID="1f28ea01430cdfb20a10736313f817e3">
     <xsd:element name="properties">
@@ -35028,7 +34366,7 @@
 </ct:contentTypeSchema>
 </file>
 
-<file path=customXml/item3.xml><?xml version="1.0" encoding="utf-8"?>
+<file path=customXml/item2.xml><?xml version="1.0" encoding="utf-8"?>
 <?mso-contentType ?>
 <FormTemplates xmlns="http://schemas.microsoft.com/sharepoint/v3/contenttype/forms">
   <Display>DocumentLibraryForm</Display>
@@ -35037,16 +34375,13 @@
 </FormTemplates>
 </file>
 
-<file path=customXml/itemProps1.xml><?xml version="1.0" encoding="utf-8"?>
-<ds:datastoreItem xmlns:ds="http://schemas.openxmlformats.org/officeDocument/2006/customXml" ds:itemID="{7EE3B803-03E0-452A-973D-71FA51A754ED}">
-  <ds:schemaRefs>
-    <ds:schemaRef ds:uri="http://schemas.microsoft.com/office/2006/metadata/properties"/>
-    <ds:schemaRef ds:uri="http://schemas.microsoft.com/office/infopath/2007/PartnerControls"/>
-  </ds:schemaRefs>
-</ds:datastoreItem>
+<file path=customXml/item3.xml><?xml version="1.0" encoding="utf-8"?>
+<p:properties xmlns:p="http://schemas.microsoft.com/office/2006/metadata/properties" xmlns:xsi="http://www.w3.org/2001/XMLSchema-instance" xmlns:pc="http://schemas.microsoft.com/office/infopath/2007/PartnerControls">
+  <documentManagement/>
+</p:properties>
 </file>
 
-<file path=customXml/itemProps2.xml><?xml version="1.0" encoding="utf-8"?>
+<file path=customXml/itemProps1.xml><?xml version="1.0" encoding="utf-8"?>
 <ds:datastoreItem xmlns:ds="http://schemas.openxmlformats.org/officeDocument/2006/customXml" ds:itemID="{E69DE20C-3D83-4F73-B3D5-4904E50492F1}">
   <ds:schemaRefs>
     <ds:schemaRef ds:uri="http://schemas.microsoft.com/office/2006/metadata/contentType"/>
@@ -35062,10 +34397,19 @@
 </ds:datastoreItem>
 </file>
 
-<file path=customXml/itemProps3.xml><?xml version="1.0" encoding="utf-8"?>
+<file path=customXml/itemProps2.xml><?xml version="1.0" encoding="utf-8"?>
 <ds:datastoreItem xmlns:ds="http://schemas.openxmlformats.org/officeDocument/2006/customXml" ds:itemID="{E0F32828-20FB-41F1-93A8-15BC4BB130A9}">
   <ds:schemaRefs>
     <ds:schemaRef ds:uri="http://schemas.microsoft.com/sharepoint/v3/contenttype/forms"/>
   </ds:schemaRefs>
 </ds:datastoreItem>
+</file>
+
+<file path=customXml/itemProps3.xml><?xml version="1.0" encoding="utf-8"?>
+<ds:datastoreItem xmlns:ds="http://schemas.openxmlformats.org/officeDocument/2006/customXml" ds:itemID="{7EE3B803-03E0-452A-973D-71FA51A754ED}">
+  <ds:schemaRefs>
+    <ds:schemaRef ds:uri="http://schemas.microsoft.com/office/2006/metadata/properties"/>
+    <ds:schemaRef ds:uri="http://schemas.microsoft.com/office/infopath/2007/PartnerControls"/>
+  </ds:schemaRefs>
+</ds:datastoreItem>
 </file>